--- a/docs/Formato presentacion evaluacion parcial 1.pptx
+++ b/docs/Formato presentacion evaluacion parcial 1.pptx
@@ -13,7 +13,7 @@
     <p:sldMasterId id="2147483664" r:id="rId9"/>
   </p:sldMasterIdLst>
   <p:notesMasterIdLst>
-    <p:notesMasterId r:id="rId25"/>
+    <p:notesMasterId r:id="rId26"/>
   </p:notesMasterIdLst>
   <p:sldIdLst>
     <p:sldId id="256" r:id="rId10"/>
@@ -24,13 +24,14 @@
     <p:sldId id="261" r:id="rId15"/>
     <p:sldId id="262" r:id="rId16"/>
     <p:sldId id="263" r:id="rId17"/>
-    <p:sldId id="270" r:id="rId18"/>
-    <p:sldId id="269" r:id="rId19"/>
+    <p:sldId id="269" r:id="rId18"/>
+    <p:sldId id="270" r:id="rId19"/>
     <p:sldId id="264" r:id="rId20"/>
     <p:sldId id="265" r:id="rId21"/>
-    <p:sldId id="266" r:id="rId22"/>
-    <p:sldId id="267" r:id="rId23"/>
-    <p:sldId id="268" r:id="rId24"/>
+    <p:sldId id="271" r:id="rId22"/>
+    <p:sldId id="266" r:id="rId23"/>
+    <p:sldId id="267" r:id="rId24"/>
+    <p:sldId id="268" r:id="rId25"/>
   </p:sldIdLst>
   <p:sldSz cx="12192000" cy="6858000"/>
   <p:notesSz cx="6858000" cy="9144000"/>
@@ -264,8 +265,11 @@
     </a:lvl9pPr>
   </p:defaultTextStyle>
   <p:extLst>
+    <p:ext uri="{EFAFB233-063F-42B5-8137-9DF3F51BA10A}">
+      <p15:sldGuideLst xmlns:p15="http://schemas.microsoft.com/office/powerpoint/2012/main"/>
+    </p:ext>
     <p:ext uri="GoogleSlidesCustomDataVersion2">
-      <go:slidesCustomData xmlns:go="http://customooxmlschemas.google.com/" xmlns:ahyp="http://schemas.microsoft.com/office/drawing/2018/hyperlinkcolor" xmlns:p15="http://schemas.microsoft.com/office/powerpoint/2012/main" xmlns:p14="http://schemas.microsoft.com/office/powerpoint/2010/main" xmlns:com="http://schemas.openxmlformats.org/drawingml/2006/compatibility" xmlns:pvml="urn:schemas-microsoft-com:office:powerpoint" xmlns:v="urn:schemas-microsoft-com:vml" xmlns:o="urn:schemas-microsoft-com:office:office" xmlns:dgm="http://schemas.openxmlformats.org/drawingml/2006/diagram" xmlns:c="http://schemas.openxmlformats.org/drawingml/2006/chart" xmlns:mv="urn:schemas-microsoft-com:mac:vml" xmlns:mc="http://schemas.openxmlformats.org/markup-compatibility/2006" xmlns="" r:id="rId26" roundtripDataSignature="AMtx7mjKlC/wQVDpWi+AIniRjO3dTFFOPw=="/>
+      <go:slidesCustomData xmlns="" xmlns:mc="http://schemas.openxmlformats.org/markup-compatibility/2006" xmlns:mv="urn:schemas-microsoft-com:mac:vml" xmlns:c="http://schemas.openxmlformats.org/drawingml/2006/chart" xmlns:dgm="http://schemas.openxmlformats.org/drawingml/2006/diagram" xmlns:o="urn:schemas-microsoft-com:office:office" xmlns:v="urn:schemas-microsoft-com:vml" xmlns:pvml="urn:schemas-microsoft-com:office:powerpoint" xmlns:com="http://schemas.openxmlformats.org/drawingml/2006/compatibility" xmlns:p14="http://schemas.microsoft.com/office/powerpoint/2010/main" xmlns:p15="http://schemas.microsoft.com/office/powerpoint/2012/main" xmlns:ahyp="http://schemas.microsoft.com/office/drawing/2018/hyperlinkcolor" xmlns:go="http://customooxmlschemas.google.com/" r:id="rId27" roundtripDataSignature="AMtx7mjKlC/wQVDpWi+AIniRjO3dTFFOPw=="/>
     </p:ext>
   </p:extLst>
 </p:presentation>
@@ -1454,8 +1458,8 @@
         </p:nvSpPr>
         <p:spPr>
           <a:xfrm>
-            <a:off x="216000" y="812520"/>
-            <a:ext cx="7127280" cy="4008960"/>
+            <a:off x="217488" y="812800"/>
+            <a:ext cx="7124700" cy="4008438"/>
           </a:xfrm>
           <a:custGeom>
             <a:avLst/>
@@ -1974,8 +1978,8 @@
         </p:nvSpPr>
         <p:spPr>
           <a:xfrm>
-            <a:off x="216000" y="812520"/>
-            <a:ext cx="7127280" cy="4008960"/>
+            <a:off x="217488" y="812800"/>
+            <a:ext cx="7124700" cy="4008438"/>
           </a:xfrm>
           <a:custGeom>
             <a:avLst/>
@@ -16873,38 +16877,299 @@
       </p:grpSpPr>
       <p:pic>
         <p:nvPicPr>
-          <p:cNvPr id="3" name="Imagen 2">
-            <a:extLst>
-              <a:ext uri="{FF2B5EF4-FFF2-40B4-BE49-F238E27FC236}">
-                <a16:creationId xmlns:a16="http://schemas.microsoft.com/office/drawing/2014/main" id="{B6274A9D-7D1B-C2E3-7D44-B99CD0255ED5}"/>
-              </a:ext>
-            </a:extLst>
-          </p:cNvPr>
-          <p:cNvPicPr>
-            <a:picLocks noChangeAspect="1"/>
-          </p:cNvPicPr>
+          <p:cNvPr id="154" name="Google Shape;154;p8" title="f92a947a-d798-41fa-8517-f92d9db51d75.png"/>
+          <p:cNvPicPr preferRelativeResize="0"/>
           <p:nvPr/>
         </p:nvPicPr>
         <p:blipFill>
-          <a:blip r:embed="rId2"/>
+          <a:blip r:embed="rId2">
+            <a:alphaModFix/>
+          </a:blip>
           <a:stretch>
             <a:fillRect/>
           </a:stretch>
         </p:blipFill>
         <p:spPr>
           <a:xfrm>
-            <a:off x="318281" y="1378172"/>
-            <a:ext cx="11555438" cy="3743847"/>
+            <a:off x="248049" y="1651713"/>
+            <a:ext cx="6430615" cy="3212473"/>
           </a:xfrm>
           <a:prstGeom prst="rect">
             <a:avLst/>
           </a:prstGeom>
+          <a:noFill/>
+          <a:ln>
+            <a:noFill/>
+          </a:ln>
         </p:spPr>
       </p:pic>
+      <p:pic>
+        <p:nvPicPr>
+          <p:cNvPr id="153" name="Google Shape;153;p8" title="72ca74db-9f68-4424-bfc8-93bd98be6eed.png"/>
+          <p:cNvPicPr preferRelativeResize="0"/>
+          <p:nvPr/>
+        </p:nvPicPr>
+        <p:blipFill>
+          <a:blip r:embed="rId3">
+            <a:alphaModFix/>
+          </a:blip>
+          <a:stretch>
+            <a:fillRect/>
+          </a:stretch>
+        </p:blipFill>
+        <p:spPr>
+          <a:xfrm>
+            <a:off x="7016277" y="1651713"/>
+            <a:ext cx="4731027" cy="3314686"/>
+          </a:xfrm>
+          <a:prstGeom prst="rect">
+            <a:avLst/>
+          </a:prstGeom>
+          <a:noFill/>
+          <a:ln>
+            <a:noFill/>
+          </a:ln>
+        </p:spPr>
+      </p:pic>
+      <p:sp>
+        <p:nvSpPr>
+          <p:cNvPr id="5" name="CuadroTexto 4">
+            <a:extLst>
+              <a:ext uri="{FF2B5EF4-FFF2-40B4-BE49-F238E27FC236}">
+                <a16:creationId xmlns:a16="http://schemas.microsoft.com/office/drawing/2014/main" id="{BFC884C8-B7D1-ED30-3904-CF258F4B9F1E}"/>
+              </a:ext>
+            </a:extLst>
+          </p:cNvPr>
+          <p:cNvSpPr txBox="1"/>
+          <p:nvPr/>
+        </p:nvSpPr>
+        <p:spPr>
+          <a:xfrm>
+            <a:off x="757083" y="257395"/>
+            <a:ext cx="10481187" cy="1395703"/>
+          </a:xfrm>
+          <a:prstGeom prst="rect">
+            <a:avLst/>
+          </a:prstGeom>
+          <a:noFill/>
+        </p:spPr>
+        <p:txBody>
+          <a:bodyPr wrap="square">
+            <a:spAutoFit/>
+          </a:bodyPr>
+          <a:lstStyle/>
+          <a:p>
+            <a:pPr marL="457200" lvl="0" indent="-292100" algn="l" rtl="0">
+              <a:lnSpc>
+                <a:spcPct val="115000"/>
+              </a:lnSpc>
+              <a:spcBef>
+                <a:spcPts val="1300"/>
+              </a:spcBef>
+              <a:spcAft>
+                <a:spcPts val="0"/>
+              </a:spcAft>
+              <a:buClr>
+                <a:schemeClr val="dk1"/>
+              </a:buClr>
+              <a:buSzPts val="1000"/>
+              <a:buChar char="●"/>
+            </a:pPr>
+            <a:r>
+              <a:rPr lang="es-CL" sz="1400" dirty="0">
+                <a:solidFill>
+                  <a:schemeClr val="dk1"/>
+                </a:solidFill>
+                <a:highlight>
+                  <a:schemeClr val="lt1"/>
+                </a:highlight>
+              </a:rPr>
+              <a:t>La demanda se concentra en </a:t>
+            </a:r>
+            <a:r>
+              <a:rPr lang="es-CL" sz="1400" dirty="0" err="1">
+                <a:solidFill>
+                  <a:schemeClr val="dk1"/>
+                </a:solidFill>
+                <a:highlight>
+                  <a:schemeClr val="lt1"/>
+                </a:highlight>
+              </a:rPr>
+              <a:t>triage</a:t>
+            </a:r>
+            <a:r>
+              <a:rPr lang="es-CL" sz="1400" dirty="0">
+                <a:solidFill>
+                  <a:schemeClr val="dk1"/>
+                </a:solidFill>
+                <a:highlight>
+                  <a:schemeClr val="lt1"/>
+                </a:highlight>
+              </a:rPr>
+              <a:t> medios, lo que indica que llegan muchas urgencias de complejidad intermedia.</a:t>
+            </a:r>
+          </a:p>
+          <a:p>
+            <a:pPr marL="457200" indent="-292100">
+              <a:lnSpc>
+                <a:spcPct val="115000"/>
+              </a:lnSpc>
+              <a:spcBef>
+                <a:spcPts val="1300"/>
+              </a:spcBef>
+              <a:buClr>
+                <a:schemeClr val="dk1"/>
+              </a:buClr>
+              <a:buSzPts val="1000"/>
+              <a:buFont typeface="Arial"/>
+              <a:buChar char="●"/>
+            </a:pPr>
+            <a:r>
+              <a:rPr lang="es-ES" dirty="0">
+                <a:solidFill>
+                  <a:schemeClr val="dk1"/>
+                </a:solidFill>
+                <a:highlight>
+                  <a:schemeClr val="lt1"/>
+                </a:highlight>
+              </a:rPr>
+              <a:t>Al mirar el costo por </a:t>
+            </a:r>
+            <a:r>
+              <a:rPr lang="es-ES" dirty="0" err="1">
+                <a:solidFill>
+                  <a:schemeClr val="dk1"/>
+                </a:solidFill>
+                <a:highlight>
+                  <a:schemeClr val="lt1"/>
+                </a:highlight>
+              </a:rPr>
+              <a:t>triage</a:t>
+            </a:r>
+            <a:r>
+              <a:rPr lang="es-ES" dirty="0">
+                <a:solidFill>
+                  <a:schemeClr val="dk1"/>
+                </a:solidFill>
+                <a:highlight>
+                  <a:schemeClr val="lt1"/>
+                </a:highlight>
+              </a:rPr>
+              <a:t>, se observa que los niveles más complejos tienden a mostrar mayor variación y, en general, mayor costo.</a:t>
+            </a:r>
+          </a:p>
+          <a:p>
+            <a:pPr marL="457200" lvl="0" indent="-292100" algn="l" rtl="0">
+              <a:lnSpc>
+                <a:spcPct val="115000"/>
+              </a:lnSpc>
+              <a:spcBef>
+                <a:spcPts val="1300"/>
+              </a:spcBef>
+              <a:spcAft>
+                <a:spcPts val="0"/>
+              </a:spcAft>
+              <a:buClr>
+                <a:schemeClr val="dk1"/>
+              </a:buClr>
+              <a:buSzPts val="1000"/>
+              <a:buChar char="●"/>
+            </a:pPr>
+            <a:endParaRPr lang="es-CL" sz="1400" dirty="0">
+              <a:solidFill>
+                <a:schemeClr val="dk1"/>
+              </a:solidFill>
+              <a:highlight>
+                <a:schemeClr val="lt1"/>
+              </a:highlight>
+            </a:endParaRPr>
+          </a:p>
+        </p:txBody>
+      </p:sp>
+      <p:sp>
+        <p:nvSpPr>
+          <p:cNvPr id="9" name="CuadroTexto 8">
+            <a:extLst>
+              <a:ext uri="{FF2B5EF4-FFF2-40B4-BE49-F238E27FC236}">
+                <a16:creationId xmlns:a16="http://schemas.microsoft.com/office/drawing/2014/main" id="{95FD07EA-FAF7-BE8F-B0BA-9E83522C301D}"/>
+              </a:ext>
+            </a:extLst>
+          </p:cNvPr>
+          <p:cNvSpPr txBox="1"/>
+          <p:nvPr/>
+        </p:nvSpPr>
+        <p:spPr>
+          <a:xfrm>
+            <a:off x="570270" y="5082040"/>
+            <a:ext cx="10481187" cy="814518"/>
+          </a:xfrm>
+          <a:prstGeom prst="rect">
+            <a:avLst/>
+          </a:prstGeom>
+          <a:noFill/>
+        </p:spPr>
+        <p:txBody>
+          <a:bodyPr wrap="square">
+            <a:spAutoFit/>
+          </a:bodyPr>
+          <a:lstStyle/>
+          <a:p>
+            <a:pPr marL="0" lvl="0" indent="0" algn="l" rtl="0">
+              <a:lnSpc>
+                <a:spcPct val="115000"/>
+              </a:lnSpc>
+              <a:spcBef>
+                <a:spcPts val="1300"/>
+              </a:spcBef>
+              <a:spcAft>
+                <a:spcPts val="0"/>
+              </a:spcAft>
+              <a:buClr>
+                <a:schemeClr val="dk1"/>
+              </a:buClr>
+              <a:buSzPts val="1100"/>
+              <a:buFont typeface="Arial"/>
+              <a:buNone/>
+            </a:pPr>
+            <a:r>
+              <a:rPr lang="es-ES" sz="1400" dirty="0">
+                <a:solidFill>
+                  <a:schemeClr val="dk1"/>
+                </a:solidFill>
+                <a:highlight>
+                  <a:schemeClr val="lt1"/>
+                </a:highlight>
+              </a:rPr>
+              <a:t>Conclusión:</a:t>
+            </a:r>
+            <a:br>
+              <a:rPr lang="es-ES" sz="1400" dirty="0">
+                <a:solidFill>
+                  <a:schemeClr val="dk1"/>
+                </a:solidFill>
+                <a:highlight>
+                  <a:schemeClr val="lt1"/>
+                </a:highlight>
+              </a:rPr>
+            </a:br>
+            <a:r>
+              <a:rPr lang="es-ES" sz="1400" dirty="0">
+                <a:solidFill>
+                  <a:schemeClr val="dk1"/>
+                </a:solidFill>
+                <a:highlight>
+                  <a:schemeClr val="lt1"/>
+                </a:highlight>
+              </a:rPr>
+              <a:t>La red de urgencias atiende principalmente casos de complejidad intermedia, con mayor carga en hospitales y costos muy variables según el tipo de atención y la gravedad.</a:t>
+            </a:r>
+          </a:p>
+        </p:txBody>
+      </p:sp>
     </p:spTree>
     <p:extLst>
       <p:ext uri="{BB962C8B-B14F-4D97-AF65-F5344CB8AC3E}">
-        <p14:creationId xmlns:p14="http://schemas.microsoft.com/office/powerpoint/2010/main" val="988563917"/>
+        <p14:creationId xmlns:p14="http://schemas.microsoft.com/office/powerpoint/2010/main" val="848884770"/>
       </p:ext>
     </p:extLst>
   </p:cSld>
@@ -16978,7 +17243,7 @@
               <a:buChar char="•"/>
             </a:pPr>
             <a:r>
-              <a:rPr lang="es-CL" sz="3200" b="1" i="0" u="none" strike="noStrike" cap="none">
+              <a:rPr lang="es-CL" sz="3200" b="1" i="0" u="none" strike="noStrike" cap="none" dirty="0">
                 <a:solidFill>
                   <a:schemeClr val="dk1"/>
                 </a:solidFill>
@@ -16989,7 +17254,7 @@
               </a:rPr>
               <a:t>Ejemplo de código</a:t>
             </a:r>
-            <a:endParaRPr sz="3200" b="0" i="0" u="none" strike="noStrike" cap="none">
+            <a:endParaRPr sz="3200" b="0" i="0" u="none" strike="noStrike" cap="none" dirty="0">
               <a:solidFill>
                 <a:schemeClr val="dk1"/>
               </a:solidFill>
@@ -17013,8 +17278,8 @@
         </p:nvSpPr>
         <p:spPr>
           <a:xfrm>
-            <a:off x="356462" y="1305063"/>
-            <a:ext cx="5925068" cy="4539146"/>
+            <a:off x="170932" y="1224571"/>
+            <a:ext cx="6227841" cy="4863713"/>
           </a:xfrm>
           <a:prstGeom prst="rect">
             <a:avLst/>
@@ -17026,7 +17291,7 @@
         </p:spPr>
         <p:txBody>
           <a:bodyPr spcFirstLastPara="1" wrap="square" lIns="91425" tIns="45700" rIns="91425" bIns="45700" anchor="t" anchorCtr="0">
-            <a:normAutofit fontScale="70000" lnSpcReduction="20000"/>
+            <a:normAutofit fontScale="77500" lnSpcReduction="20000"/>
           </a:bodyPr>
           <a:lstStyle/>
           <a:p>
@@ -17048,7 +17313,7 @@
               <a:buNone/>
             </a:pPr>
             <a:r>
-              <a:rPr lang="es-CL" sz="1600" b="1" i="0" u="none" strike="noStrike" cap="none" dirty="0">
+              <a:rPr lang="es-CL" sz="1700" b="1" i="0" u="none" strike="noStrike" cap="none" dirty="0">
                 <a:solidFill>
                   <a:schemeClr val="dk1"/>
                 </a:solidFill>
@@ -17059,32 +17324,7 @@
               </a:rPr>
               <a:t>MÉTRICAS — Regresión Lineal</a:t>
             </a:r>
-            <a:endParaRPr sz="1600" b="0" i="0" u="none" strike="noStrike" cap="none" dirty="0">
-              <a:solidFill>
-                <a:schemeClr val="dk1"/>
-              </a:solidFill>
-              <a:latin typeface="Arial"/>
-              <a:ea typeface="Arial"/>
-              <a:cs typeface="Arial"/>
-              <a:sym typeface="Arial"/>
-            </a:endParaRPr>
-          </a:p>
-          <a:p>
-            <a:pPr marL="0" marR="0" lvl="0" indent="0" algn="l" rtl="0">
-              <a:lnSpc>
-                <a:spcPct val="90000"/>
-              </a:lnSpc>
-              <a:spcBef>
-                <a:spcPts val="1001"/>
-              </a:spcBef>
-              <a:spcAft>
-                <a:spcPts val="0"/>
-              </a:spcAft>
-              <a:buSzPct val="100000"/>
-              <a:buFont typeface="Arial"/>
-              <a:buNone/>
-            </a:pPr>
-            <a:endParaRPr sz="1600" b="0" i="0" u="none" strike="noStrike" cap="none" dirty="0">
+            <a:endParaRPr sz="1700" b="0" i="0" u="none" strike="noStrike" cap="none" dirty="0">
               <a:solidFill>
                 <a:schemeClr val="dk1"/>
               </a:solidFill>
@@ -17111,7 +17351,7 @@
               <a:buNone/>
             </a:pPr>
             <a:r>
-              <a:rPr lang="es-CL" sz="1600" dirty="0">
+              <a:rPr lang="es-CL" sz="1700" dirty="0">
                 <a:solidFill>
                   <a:schemeClr val="dk1"/>
                 </a:solidFill>
@@ -17121,7 +17361,7 @@
               </a:rPr>
               <a:t>Las métricas exactas de la regresión lineal son:</a:t>
             </a:r>
-            <a:endParaRPr sz="1600" dirty="0">
+            <a:endParaRPr sz="1700" dirty="0">
               <a:solidFill>
                 <a:schemeClr val="dk1"/>
               </a:solidFill>
@@ -17148,7 +17388,7 @@
               <a:buChar char="●"/>
             </a:pPr>
             <a:r>
-              <a:rPr lang="es-CL" sz="1600" dirty="0">
+              <a:rPr lang="es-CL" sz="1700" dirty="0">
                 <a:solidFill>
                   <a:schemeClr val="dk1"/>
                 </a:solidFill>
@@ -17156,10 +17396,10 @@
                   <a:schemeClr val="lt1"/>
                 </a:highlight>
               </a:rPr>
-              <a:t>R2(</a:t>
-            </a:r>
-            <a:r>
-              <a:rPr lang="es-CL" sz="1600" dirty="0" err="1">
+              <a:t>R2 (</a:t>
+            </a:r>
+            <a:r>
+              <a:rPr lang="es-CL" sz="1700" dirty="0" err="1">
                 <a:solidFill>
                   <a:schemeClr val="dk1"/>
                 </a:solidFill>
@@ -17170,7 +17410,7 @@
               <a:t>coef</a:t>
             </a:r>
             <a:r>
-              <a:rPr lang="es-CL" sz="1600" dirty="0">
+              <a:rPr lang="es-CL" sz="1700" dirty="0">
                 <a:solidFill>
                   <a:schemeClr val="dk1"/>
                 </a:solidFill>
@@ -17180,7 +17420,7 @@
               </a:rPr>
               <a:t>. determinación) : -0.0020 </a:t>
             </a:r>
-            <a:endParaRPr sz="1600" dirty="0">
+            <a:endParaRPr sz="1700" dirty="0">
               <a:solidFill>
                 <a:schemeClr val="dk1"/>
               </a:solidFill>
@@ -17207,7 +17447,7 @@
               <a:buChar char="●"/>
             </a:pPr>
             <a:r>
-              <a:rPr lang="es-CL" sz="1600" dirty="0">
+              <a:rPr lang="es-CL" sz="1700" dirty="0">
                 <a:solidFill>
                   <a:schemeClr val="dk1"/>
                 </a:solidFill>
@@ -17215,9 +17455,9 @@
                   <a:schemeClr val="lt1"/>
                 </a:highlight>
               </a:rPr>
-              <a:t>MAE(Error Medio Absoluto) : 25,296.59 CLP</a:t>
-            </a:r>
-            <a:endParaRPr sz="1600" dirty="0">
+              <a:t>MAE (Error Medio Absoluto) : 25,296.59 CLP</a:t>
+            </a:r>
+            <a:endParaRPr sz="1700" dirty="0">
               <a:solidFill>
                 <a:schemeClr val="dk1"/>
               </a:solidFill>
@@ -17244,7 +17484,7 @@
               <a:buChar char="●"/>
             </a:pPr>
             <a:r>
-              <a:rPr lang="es-CL" sz="1600" dirty="0">
+              <a:rPr lang="es-CL" sz="1700" dirty="0">
                 <a:solidFill>
                   <a:schemeClr val="dk1"/>
                 </a:solidFill>
@@ -17252,9 +17492,9 @@
                   <a:schemeClr val="lt1"/>
                 </a:highlight>
               </a:rPr>
-              <a:t>MSE(Error Cuadrático Medio) : 3,468,978,232.15 CLP²</a:t>
-            </a:r>
-            <a:endParaRPr sz="1600" dirty="0">
+              <a:t>MSE (Error Cuadrático Medio) : 3,468,978,232.15 CLP²</a:t>
+            </a:r>
+            <a:endParaRPr sz="1700" dirty="0">
               <a:solidFill>
                 <a:schemeClr val="dk1"/>
               </a:solidFill>
@@ -17281,7 +17521,7 @@
               <a:buChar char="●"/>
             </a:pPr>
             <a:r>
-              <a:rPr lang="es-CL" sz="1600" dirty="0">
+              <a:rPr lang="es-CL" sz="1700" dirty="0">
                 <a:solidFill>
                   <a:schemeClr val="dk1"/>
                 </a:solidFill>
@@ -17289,9 +17529,9 @@
                   <a:schemeClr val="lt1"/>
                 </a:highlight>
               </a:rPr>
-              <a:t>RMSE(Raíz del Error Cuadrático Medio) : 58,898.03 CLP</a:t>
-            </a:r>
-            <a:endParaRPr sz="1600" dirty="0">
+              <a:t>RMSE (Raíz del Error Cuadrático Medio) : 58,898.03 CLP</a:t>
+            </a:r>
+            <a:endParaRPr sz="1700" dirty="0">
               <a:solidFill>
                 <a:schemeClr val="dk1"/>
               </a:solidFill>
@@ -17314,7 +17554,7 @@
               <a:buNone/>
             </a:pPr>
             <a:r>
-              <a:rPr lang="es-CL" sz="1600" dirty="0">
+              <a:rPr lang="es-CL" sz="1700" dirty="0">
                 <a:solidFill>
                   <a:schemeClr val="dk1"/>
                 </a:solidFill>
@@ -17324,7 +17564,7 @@
               </a:rPr>
               <a:t>La interpretación es esta:</a:t>
             </a:r>
-            <a:endParaRPr sz="1600" dirty="0">
+            <a:endParaRPr sz="1700" dirty="0">
               <a:solidFill>
                 <a:schemeClr val="dk1"/>
               </a:solidFill>
@@ -17351,7 +17591,7 @@
               <a:buChar char="●"/>
             </a:pPr>
             <a:r>
-              <a:rPr lang="es-CL" sz="1600" dirty="0">
+              <a:rPr lang="es-CL" sz="1700" dirty="0">
                 <a:solidFill>
                   <a:schemeClr val="dk1"/>
                 </a:solidFill>
@@ -17362,7 +17602,7 @@
               <a:t>R2 = -0.0020</a:t>
             </a:r>
             <a:br>
-              <a:rPr lang="es-CL" sz="1600" dirty="0">
+              <a:rPr lang="es-CL" sz="1700" dirty="0">
                 <a:solidFill>
                   <a:schemeClr val="dk1"/>
                 </a:solidFill>
@@ -17372,7 +17612,7 @@
               </a:rPr>
             </a:br>
             <a:r>
-              <a:rPr lang="es-CL" sz="1600" dirty="0">
+              <a:rPr lang="es-CL" sz="1700" dirty="0">
                 <a:solidFill>
                   <a:schemeClr val="dk1"/>
                 </a:solidFill>
@@ -17400,7 +17640,7 @@
               <a:buSzPct val="100000"/>
               <a:buChar char="●"/>
             </a:pPr>
-            <a:endParaRPr sz="1600" dirty="0">
+            <a:endParaRPr sz="1700" dirty="0">
               <a:solidFill>
                 <a:schemeClr val="dk1"/>
               </a:solidFill>
@@ -17427,7 +17667,7 @@
               <a:buChar char="●"/>
             </a:pPr>
             <a:r>
-              <a:rPr lang="es-CL" sz="1600" dirty="0">
+              <a:rPr lang="es-CL" sz="1700" dirty="0">
                 <a:solidFill>
                   <a:schemeClr val="dk1"/>
                 </a:solidFill>
@@ -17438,7 +17678,7 @@
               <a:t>MAE = 25,296.59 CLP</a:t>
             </a:r>
             <a:br>
-              <a:rPr lang="es-CL" sz="1600" dirty="0">
+              <a:rPr lang="es-CL" sz="1700" dirty="0">
                 <a:solidFill>
                   <a:schemeClr val="dk1"/>
                 </a:solidFill>
@@ -17448,7 +17688,7 @@
               </a:rPr>
             </a:br>
             <a:r>
-              <a:rPr lang="es-CL" sz="1600" dirty="0">
+              <a:rPr lang="es-CL" sz="1700" dirty="0">
                 <a:solidFill>
                   <a:schemeClr val="dk1"/>
                 </a:solidFill>
@@ -17476,7 +17716,7 @@
               <a:buSzPct val="100000"/>
               <a:buChar char="●"/>
             </a:pPr>
-            <a:endParaRPr sz="1600" dirty="0">
+            <a:endParaRPr sz="1700" dirty="0">
               <a:solidFill>
                 <a:schemeClr val="dk1"/>
               </a:solidFill>
@@ -17503,7 +17743,7 @@
               <a:buChar char="●"/>
             </a:pPr>
             <a:r>
-              <a:rPr lang="es-CL" sz="1600" dirty="0">
+              <a:rPr lang="es-CL" sz="1700" dirty="0">
                 <a:solidFill>
                   <a:schemeClr val="dk1"/>
                 </a:solidFill>
@@ -17514,7 +17754,7 @@
               <a:t>MSE = 3,468,978,232.15 CLP²</a:t>
             </a:r>
             <a:br>
-              <a:rPr lang="es-CL" sz="1600" dirty="0">
+              <a:rPr lang="es-CL" sz="1700" dirty="0">
                 <a:solidFill>
                   <a:schemeClr val="dk1"/>
                 </a:solidFill>
@@ -17524,7 +17764,7 @@
               </a:rPr>
             </a:br>
             <a:r>
-              <a:rPr lang="es-CL" sz="1600" dirty="0">
+              <a:rPr lang="es-CL" sz="1700" dirty="0">
                 <a:solidFill>
                   <a:schemeClr val="dk1"/>
                 </a:solidFill>
@@ -17552,7 +17792,7 @@
               <a:buSzPct val="100000"/>
               <a:buChar char="●"/>
             </a:pPr>
-            <a:endParaRPr sz="1600" dirty="0">
+            <a:endParaRPr sz="1700" dirty="0">
               <a:solidFill>
                 <a:schemeClr val="dk1"/>
               </a:solidFill>
@@ -17579,7 +17819,7 @@
               <a:buChar char="●"/>
             </a:pPr>
             <a:r>
-              <a:rPr lang="es-CL" sz="1600" dirty="0">
+              <a:rPr lang="es-CL" sz="1700" dirty="0">
                 <a:solidFill>
                   <a:schemeClr val="dk1"/>
                 </a:solidFill>
@@ -17590,7 +17830,7 @@
               <a:t>RMSE = 58,898.03 CLP</a:t>
             </a:r>
             <a:br>
-              <a:rPr lang="es-CL" sz="1600" dirty="0">
+              <a:rPr lang="es-CL" sz="1700" dirty="0">
                 <a:solidFill>
                   <a:schemeClr val="dk1"/>
                 </a:solidFill>
@@ -17600,7 +17840,7 @@
               </a:rPr>
             </a:br>
             <a:r>
-              <a:rPr lang="es-CL" sz="1600" dirty="0">
+              <a:rPr lang="es-CL" sz="1700" dirty="0">
                 <a:solidFill>
                   <a:schemeClr val="dk1"/>
                 </a:solidFill>
@@ -17610,7 +17850,7 @@
               </a:rPr>
               <a:t>El error típico de predicción está cerca de 59 mil pesos, lo que es elevado frente a la escala de costos observada.</a:t>
             </a:r>
-            <a:endParaRPr sz="1600" dirty="0">
+            <a:endParaRPr sz="1700" dirty="0">
               <a:solidFill>
                 <a:schemeClr val="dk1"/>
               </a:solidFill>
@@ -17648,7 +17888,7 @@
         </p:nvSpPr>
         <p:spPr>
           <a:xfrm>
-            <a:off x="5999350" y="6128672"/>
+            <a:off x="425853" y="5922533"/>
             <a:ext cx="2859000" cy="469500"/>
           </a:xfrm>
           <a:prstGeom prst="rect">
@@ -17732,8 +17972,8 @@
         </p:nvSpPr>
         <p:spPr>
           <a:xfrm>
-            <a:off x="7336322" y="168606"/>
-            <a:ext cx="6433892" cy="5804944"/>
+            <a:off x="6398773" y="75615"/>
+            <a:ext cx="6433892" cy="6620167"/>
           </a:xfrm>
           <a:prstGeom prst="rect">
             <a:avLst/>
@@ -17767,7 +18007,7 @@
               <a:buNone/>
             </a:pPr>
             <a:r>
-              <a:rPr lang="es-CL" sz="700" dirty="0" err="1">
+              <a:rPr lang="es-CL" sz="800" dirty="0" err="1">
                 <a:solidFill>
                   <a:schemeClr val="dk1"/>
                 </a:solidFill>
@@ -17782,7 +18022,7 @@
               <a:t>Desempeno</a:t>
             </a:r>
             <a:r>
-              <a:rPr lang="es-CL" sz="700" dirty="0">
+              <a:rPr lang="es-CL" sz="800" dirty="0">
                 <a:solidFill>
                   <a:schemeClr val="dk1"/>
                 </a:solidFill>
@@ -17797,7 +18037,7 @@
               <a:t> modelo de gasto: </a:t>
             </a:r>
             <a:r>
-              <a:rPr lang="es-CL" sz="700" dirty="0" err="1">
+              <a:rPr lang="es-CL" sz="800" dirty="0" err="1">
                 <a:solidFill>
                   <a:schemeClr val="dk1"/>
                 </a:solidFill>
@@ -17812,7 +18052,7 @@
               <a:t>Regresion</a:t>
             </a:r>
             <a:r>
-              <a:rPr lang="es-CL" sz="700" dirty="0">
+              <a:rPr lang="es-CL" sz="800" dirty="0">
                 <a:solidFill>
                   <a:schemeClr val="dk1"/>
                 </a:solidFill>
@@ -17846,7 +18086,7 @@
               <a:buNone/>
             </a:pPr>
             <a:r>
-              <a:rPr lang="es-CL" sz="700" dirty="0" err="1">
+              <a:rPr lang="es-CL" sz="800" dirty="0" err="1">
                 <a:solidFill>
                   <a:schemeClr val="dk1"/>
                 </a:solidFill>
@@ -17861,7 +18101,7 @@
               <a:t>if</a:t>
             </a:r>
             <a:r>
-              <a:rPr lang="es-CL" sz="700" dirty="0">
+              <a:rPr lang="es-CL" sz="800" dirty="0">
                 <a:solidFill>
                   <a:schemeClr val="dk1"/>
                 </a:solidFill>
@@ -17876,7 +18116,7 @@
               <a:t> '</a:t>
             </a:r>
             <a:r>
-              <a:rPr lang="es-CL" sz="700" dirty="0" err="1">
+              <a:rPr lang="es-CL" sz="800" dirty="0" err="1">
                 <a:solidFill>
                   <a:schemeClr val="dk1"/>
                 </a:solidFill>
@@ -17891,7 +18131,7 @@
               <a:t>costoatencionclp</a:t>
             </a:r>
             <a:r>
-              <a:rPr lang="es-CL" sz="700" dirty="0">
+              <a:rPr lang="es-CL" sz="800" dirty="0">
                 <a:solidFill>
                   <a:schemeClr val="dk1"/>
                 </a:solidFill>
@@ -17906,7 +18146,7 @@
               <a:t>' in </a:t>
             </a:r>
             <a:r>
-              <a:rPr lang="es-CL" sz="700" dirty="0" err="1">
+              <a:rPr lang="es-CL" sz="800" dirty="0" err="1">
                 <a:solidFill>
                   <a:schemeClr val="dk1"/>
                 </a:solidFill>
@@ -17921,7 +18161,7 @@
               <a:t>df.columns</a:t>
             </a:r>
             <a:r>
-              <a:rPr lang="es-CL" sz="700" dirty="0">
+              <a:rPr lang="es-CL" sz="800" dirty="0">
                 <a:solidFill>
                   <a:schemeClr val="dk1"/>
                 </a:solidFill>
@@ -17955,7 +18195,7 @@
               <a:buNone/>
             </a:pPr>
             <a:r>
-              <a:rPr lang="es-CL" sz="700" dirty="0">
+              <a:rPr lang="es-CL" sz="800" dirty="0">
                 <a:solidFill>
                   <a:schemeClr val="dk1"/>
                 </a:solidFill>
@@ -17970,7 +18210,7 @@
               <a:t>   </a:t>
             </a:r>
             <a:r>
-              <a:rPr lang="es-CL" sz="700" dirty="0" err="1">
+              <a:rPr lang="es-CL" sz="800" dirty="0" err="1">
                 <a:solidFill>
                   <a:schemeClr val="dk1"/>
                 </a:solidFill>
@@ -17985,7 +18225,7 @@
               <a:t>cols_candidatas</a:t>
             </a:r>
             <a:r>
-              <a:rPr lang="es-CL" sz="700" dirty="0">
+              <a:rPr lang="es-CL" sz="800" dirty="0">
                 <a:solidFill>
                   <a:schemeClr val="dk1"/>
                 </a:solidFill>
@@ -18000,7 +18240,7 @@
               <a:t> = ['causa', '</a:t>
             </a:r>
             <a:r>
-              <a:rPr lang="es-CL" sz="700" dirty="0" err="1">
+              <a:rPr lang="es-CL" sz="800" dirty="0" err="1">
                 <a:solidFill>
                   <a:schemeClr val="dk1"/>
                 </a:solidFill>
@@ -18015,7 +18255,7 @@
               <a:t>prioridadtriage</a:t>
             </a:r>
             <a:r>
-              <a:rPr lang="es-CL" sz="700" dirty="0">
+              <a:rPr lang="es-CL" sz="800" dirty="0">
                 <a:solidFill>
                   <a:schemeClr val="dk1"/>
                 </a:solidFill>
@@ -18030,7 +18270,7 @@
               <a:t>', '</a:t>
             </a:r>
             <a:r>
-              <a:rPr lang="es-CL" sz="700" dirty="0" err="1">
+              <a:rPr lang="es-CL" sz="800" dirty="0" err="1">
                 <a:solidFill>
                   <a:schemeClr val="dk1"/>
                 </a:solidFill>
@@ -18045,7 +18285,7 @@
               <a:t>regionglosa</a:t>
             </a:r>
             <a:r>
-              <a:rPr lang="es-CL" sz="700" dirty="0">
+              <a:rPr lang="es-CL" sz="800" dirty="0">
                 <a:solidFill>
                   <a:schemeClr val="dk1"/>
                 </a:solidFill>
@@ -18060,7 +18300,7 @@
               <a:t>', '</a:t>
             </a:r>
             <a:r>
-              <a:rPr lang="es-CL" sz="700" dirty="0" err="1">
+              <a:rPr lang="es-CL" sz="800" dirty="0" err="1">
                 <a:solidFill>
                   <a:schemeClr val="dk1"/>
                 </a:solidFill>
@@ -18075,7 +18315,7 @@
               <a:t>tipoestablecimiento</a:t>
             </a:r>
             <a:r>
-              <a:rPr lang="es-CL" sz="700" dirty="0">
+              <a:rPr lang="es-CL" sz="800" dirty="0">
                 <a:solidFill>
                   <a:schemeClr val="dk1"/>
                 </a:solidFill>
@@ -18109,7 +18349,7 @@
               <a:buNone/>
             </a:pPr>
             <a:r>
-              <a:rPr lang="es-CL" sz="700" dirty="0">
+              <a:rPr lang="es-CL" sz="800" dirty="0">
                 <a:solidFill>
                   <a:schemeClr val="dk1"/>
                 </a:solidFill>
@@ -18124,7 +18364,7 @@
               <a:t>   </a:t>
             </a:r>
             <a:r>
-              <a:rPr lang="es-CL" sz="700" dirty="0" err="1">
+              <a:rPr lang="es-CL" sz="800" dirty="0" err="1">
                 <a:solidFill>
                   <a:schemeClr val="dk1"/>
                 </a:solidFill>
@@ -18139,7 +18379,7 @@
               <a:t>cols_modelo</a:t>
             </a:r>
             <a:r>
-              <a:rPr lang="es-CL" sz="700" dirty="0">
+              <a:rPr lang="es-CL" sz="800" dirty="0">
                 <a:solidFill>
                   <a:schemeClr val="dk1"/>
                 </a:solidFill>
@@ -18154,7 +18394,7 @@
               <a:t> = [c </a:t>
             </a:r>
             <a:r>
-              <a:rPr lang="es-CL" sz="700" dirty="0" err="1">
+              <a:rPr lang="es-CL" sz="800" dirty="0" err="1">
                 <a:solidFill>
                   <a:schemeClr val="dk1"/>
                 </a:solidFill>
@@ -18169,7 +18409,7 @@
               <a:t>for</a:t>
             </a:r>
             <a:r>
-              <a:rPr lang="es-CL" sz="700" dirty="0">
+              <a:rPr lang="es-CL" sz="800" dirty="0">
                 <a:solidFill>
                   <a:schemeClr val="dk1"/>
                 </a:solidFill>
@@ -18184,7 +18424,7 @@
               <a:t> c in </a:t>
             </a:r>
             <a:r>
-              <a:rPr lang="es-CL" sz="700" dirty="0" err="1">
+              <a:rPr lang="es-CL" sz="800" dirty="0" err="1">
                 <a:solidFill>
                   <a:schemeClr val="dk1"/>
                 </a:solidFill>
@@ -18199,7 +18439,7 @@
               <a:t>cols_candidatas</a:t>
             </a:r>
             <a:r>
-              <a:rPr lang="es-CL" sz="700" dirty="0">
+              <a:rPr lang="es-CL" sz="800" dirty="0">
                 <a:solidFill>
                   <a:schemeClr val="dk1"/>
                 </a:solidFill>
@@ -18214,7 +18454,7 @@
               <a:t> </a:t>
             </a:r>
             <a:r>
-              <a:rPr lang="es-CL" sz="700" dirty="0" err="1">
+              <a:rPr lang="es-CL" sz="800" dirty="0" err="1">
                 <a:solidFill>
                   <a:schemeClr val="dk1"/>
                 </a:solidFill>
@@ -18229,7 +18469,7 @@
               <a:t>if</a:t>
             </a:r>
             <a:r>
-              <a:rPr lang="es-CL" sz="700" dirty="0">
+              <a:rPr lang="es-CL" sz="800" dirty="0">
                 <a:solidFill>
                   <a:schemeClr val="dk1"/>
                 </a:solidFill>
@@ -18244,7 +18484,7 @@
               <a:t> c in </a:t>
             </a:r>
             <a:r>
-              <a:rPr lang="es-CL" sz="700" dirty="0" err="1">
+              <a:rPr lang="es-CL" sz="800" dirty="0" err="1">
                 <a:solidFill>
                   <a:schemeClr val="dk1"/>
                 </a:solidFill>
@@ -18259,7 +18499,7 @@
               <a:t>df.columns</a:t>
             </a:r>
             <a:r>
-              <a:rPr lang="es-CL" sz="700" dirty="0">
+              <a:rPr lang="es-CL" sz="800" dirty="0">
                 <a:solidFill>
                   <a:schemeClr val="dk1"/>
                 </a:solidFill>
@@ -18293,7 +18533,7 @@
               <a:buNone/>
             </a:pPr>
             <a:r>
-              <a:rPr lang="es-CL" sz="700" dirty="0">
+              <a:rPr lang="es-CL" sz="800" dirty="0">
                 <a:solidFill>
                   <a:schemeClr val="dk1"/>
                 </a:solidFill>
@@ -18308,7 +18548,7 @@
               <a:t>   </a:t>
             </a:r>
             <a:r>
-              <a:rPr lang="es-CL" sz="700" dirty="0" err="1">
+              <a:rPr lang="es-CL" sz="800" dirty="0" err="1">
                 <a:solidFill>
                   <a:schemeClr val="dk1"/>
                 </a:solidFill>
@@ -18323,7 +18563,7 @@
               <a:t>if</a:t>
             </a:r>
             <a:r>
-              <a:rPr lang="es-CL" sz="700" dirty="0">
+              <a:rPr lang="es-CL" sz="800" dirty="0">
                 <a:solidFill>
                   <a:schemeClr val="dk1"/>
                 </a:solidFill>
@@ -18338,7 +18578,7 @@
               <a:t> </a:t>
             </a:r>
             <a:r>
-              <a:rPr lang="es-CL" sz="700" dirty="0" err="1">
+              <a:rPr lang="es-CL" sz="800" dirty="0" err="1">
                 <a:solidFill>
                   <a:schemeClr val="dk1"/>
                 </a:solidFill>
@@ -18353,7 +18593,7 @@
               <a:t>cols_modelo</a:t>
             </a:r>
             <a:r>
-              <a:rPr lang="es-CL" sz="700" dirty="0">
+              <a:rPr lang="es-CL" sz="800" dirty="0">
                 <a:solidFill>
                   <a:schemeClr val="dk1"/>
                 </a:solidFill>
@@ -18387,7 +18627,7 @@
               <a:buNone/>
             </a:pPr>
             <a:r>
-              <a:rPr lang="es-CL" sz="700" dirty="0">
+              <a:rPr lang="es-CL" sz="800" dirty="0">
                 <a:solidFill>
                   <a:schemeClr val="dk1"/>
                 </a:solidFill>
@@ -18402,7 +18642,7 @@
               <a:t>       </a:t>
             </a:r>
             <a:r>
-              <a:rPr lang="es-CL" sz="700" dirty="0" err="1">
+              <a:rPr lang="es-CL" sz="800" dirty="0" err="1">
                 <a:solidFill>
                   <a:schemeClr val="dk1"/>
                 </a:solidFill>
@@ -18417,7 +18657,7 @@
               <a:t>df_reg</a:t>
             </a:r>
             <a:r>
-              <a:rPr lang="es-CL" sz="700" dirty="0">
+              <a:rPr lang="es-CL" sz="800" dirty="0">
                 <a:solidFill>
                   <a:schemeClr val="dk1"/>
                 </a:solidFill>
@@ -18432,7 +18672,7 @@
               <a:t> = </a:t>
             </a:r>
             <a:r>
-              <a:rPr lang="es-CL" sz="700" dirty="0" err="1">
+              <a:rPr lang="es-CL" sz="800" dirty="0" err="1">
                 <a:solidFill>
                   <a:schemeClr val="dk1"/>
                 </a:solidFill>
@@ -18447,7 +18687,7 @@
               <a:t>df</a:t>
             </a:r>
             <a:r>
-              <a:rPr lang="es-CL" sz="700" dirty="0">
+              <a:rPr lang="es-CL" sz="800" dirty="0">
                 <a:solidFill>
                   <a:schemeClr val="dk1"/>
                 </a:solidFill>
@@ -18462,7 +18702,7 @@
               <a:t>[</a:t>
             </a:r>
             <a:r>
-              <a:rPr lang="es-CL" sz="700" dirty="0" err="1">
+              <a:rPr lang="es-CL" sz="800" dirty="0" err="1">
                 <a:solidFill>
                   <a:schemeClr val="dk1"/>
                 </a:solidFill>
@@ -18477,7 +18717,7 @@
               <a:t>cols_modelo</a:t>
             </a:r>
             <a:r>
-              <a:rPr lang="es-CL" sz="700" dirty="0">
+              <a:rPr lang="es-CL" sz="800" dirty="0">
                 <a:solidFill>
                   <a:schemeClr val="dk1"/>
                 </a:solidFill>
@@ -18492,7 +18732,7 @@
               <a:t> + ['</a:t>
             </a:r>
             <a:r>
-              <a:rPr lang="es-CL" sz="700" dirty="0" err="1">
+              <a:rPr lang="es-CL" sz="800" dirty="0" err="1">
                 <a:solidFill>
                   <a:schemeClr val="dk1"/>
                 </a:solidFill>
@@ -18507,7 +18747,7 @@
               <a:t>costoatencionclp</a:t>
             </a:r>
             <a:r>
-              <a:rPr lang="es-CL" sz="700" dirty="0">
+              <a:rPr lang="es-CL" sz="800" dirty="0">
                 <a:solidFill>
                   <a:schemeClr val="dk1"/>
                 </a:solidFill>
@@ -18522,7 +18762,7 @@
               <a:t>']].</a:t>
             </a:r>
             <a:r>
-              <a:rPr lang="es-CL" sz="700" dirty="0" err="1">
+              <a:rPr lang="es-CL" sz="800" dirty="0" err="1">
                 <a:solidFill>
                   <a:schemeClr val="dk1"/>
                 </a:solidFill>
@@ -18537,7 +18777,7 @@
               <a:t>dropna</a:t>
             </a:r>
             <a:r>
-              <a:rPr lang="es-CL" sz="700" dirty="0">
+              <a:rPr lang="es-CL" sz="800" dirty="0">
                 <a:solidFill>
                   <a:schemeClr val="dk1"/>
                 </a:solidFill>
@@ -18552,7 +18792,7 @@
               <a:t>().</a:t>
             </a:r>
             <a:r>
-              <a:rPr lang="es-CL" sz="700" dirty="0" err="1">
+              <a:rPr lang="es-CL" sz="800" dirty="0" err="1">
                 <a:solidFill>
                   <a:schemeClr val="dk1"/>
                 </a:solidFill>
@@ -18567,7 +18807,7 @@
               <a:t>copy</a:t>
             </a:r>
             <a:r>
-              <a:rPr lang="es-CL" sz="700" dirty="0">
+              <a:rPr lang="es-CL" sz="800" dirty="0">
                 <a:solidFill>
                   <a:schemeClr val="dk1"/>
                 </a:solidFill>
@@ -18601,7 +18841,7 @@
               <a:buNone/>
             </a:pPr>
             <a:r>
-              <a:rPr lang="es-CL" sz="700" dirty="0">
+              <a:rPr lang="es-CL" sz="800" dirty="0">
                 <a:solidFill>
                   <a:schemeClr val="dk1"/>
                 </a:solidFill>
@@ -18616,7 +18856,7 @@
               <a:t>       </a:t>
             </a:r>
             <a:r>
-              <a:rPr lang="es-CL" sz="700" dirty="0" err="1">
+              <a:rPr lang="es-CL" sz="800" dirty="0" err="1">
                 <a:solidFill>
                   <a:schemeClr val="dk1"/>
                 </a:solidFill>
@@ -18631,7 +18871,7 @@
               <a:t>X_reg</a:t>
             </a:r>
             <a:r>
-              <a:rPr lang="es-CL" sz="700" dirty="0">
+              <a:rPr lang="es-CL" sz="800" dirty="0">
                 <a:solidFill>
                   <a:schemeClr val="dk1"/>
                 </a:solidFill>
@@ -18646,7 +18886,7 @@
               <a:t> = </a:t>
             </a:r>
             <a:r>
-              <a:rPr lang="es-CL" sz="700" dirty="0" err="1">
+              <a:rPr lang="es-CL" sz="800" dirty="0" err="1">
                 <a:solidFill>
                   <a:schemeClr val="dk1"/>
                 </a:solidFill>
@@ -18661,7 +18901,7 @@
               <a:t>df_reg</a:t>
             </a:r>
             <a:r>
-              <a:rPr lang="es-CL" sz="700" dirty="0">
+              <a:rPr lang="es-CL" sz="800" dirty="0">
                 <a:solidFill>
                   <a:schemeClr val="dk1"/>
                 </a:solidFill>
@@ -18676,7 +18916,7 @@
               <a:t>[</a:t>
             </a:r>
             <a:r>
-              <a:rPr lang="es-CL" sz="700" dirty="0" err="1">
+              <a:rPr lang="es-CL" sz="800" dirty="0" err="1">
                 <a:solidFill>
                   <a:schemeClr val="dk1"/>
                 </a:solidFill>
@@ -18691,7 +18931,7 @@
               <a:t>cols_modelo</a:t>
             </a:r>
             <a:r>
-              <a:rPr lang="es-CL" sz="700" dirty="0">
+              <a:rPr lang="es-CL" sz="800" dirty="0">
                 <a:solidFill>
                   <a:schemeClr val="dk1"/>
                 </a:solidFill>
@@ -18706,7 +18946,7 @@
               <a:t>].</a:t>
             </a:r>
             <a:r>
-              <a:rPr lang="es-CL" sz="700" dirty="0" err="1">
+              <a:rPr lang="es-CL" sz="800" dirty="0" err="1">
                 <a:solidFill>
                   <a:schemeClr val="dk1"/>
                 </a:solidFill>
@@ -18721,7 +18961,7 @@
               <a:t>astype</a:t>
             </a:r>
             <a:r>
-              <a:rPr lang="es-CL" sz="700" dirty="0">
+              <a:rPr lang="es-CL" sz="800" dirty="0">
                 <a:solidFill>
                   <a:schemeClr val="dk1"/>
                 </a:solidFill>
@@ -18736,7 +18976,7 @@
               <a:t>('</a:t>
             </a:r>
             <a:r>
-              <a:rPr lang="es-CL" sz="700" dirty="0" err="1">
+              <a:rPr lang="es-CL" sz="800" dirty="0" err="1">
                 <a:solidFill>
                   <a:schemeClr val="dk1"/>
                 </a:solidFill>
@@ -18751,7 +18991,7 @@
               <a:t>string</a:t>
             </a:r>
             <a:r>
-              <a:rPr lang="es-CL" sz="700" dirty="0">
+              <a:rPr lang="es-CL" sz="800" dirty="0">
                 <a:solidFill>
                   <a:schemeClr val="dk1"/>
                 </a:solidFill>
@@ -18766,7 +19006,7 @@
               <a:t>').</a:t>
             </a:r>
             <a:r>
-              <a:rPr lang="es-CL" sz="700" dirty="0" err="1">
+              <a:rPr lang="es-CL" sz="800" dirty="0" err="1">
                 <a:solidFill>
                   <a:schemeClr val="dk1"/>
                 </a:solidFill>
@@ -18781,7 +19021,7 @@
               <a:t>fillna</a:t>
             </a:r>
             <a:r>
-              <a:rPr lang="es-CL" sz="700" dirty="0">
+              <a:rPr lang="es-CL" sz="800" dirty="0">
                 <a:solidFill>
                   <a:schemeClr val="dk1"/>
                 </a:solidFill>
@@ -18815,7 +19055,7 @@
               <a:buNone/>
             </a:pPr>
             <a:r>
-              <a:rPr lang="es-CL" sz="700" dirty="0">
+              <a:rPr lang="es-CL" sz="800" dirty="0">
                 <a:solidFill>
                   <a:schemeClr val="dk1"/>
                 </a:solidFill>
@@ -18830,7 +19070,7 @@
               <a:t>       </a:t>
             </a:r>
             <a:r>
-              <a:rPr lang="es-CL" sz="700" dirty="0" err="1">
+              <a:rPr lang="es-CL" sz="800" dirty="0" err="1">
                 <a:solidFill>
                   <a:schemeClr val="dk1"/>
                 </a:solidFill>
@@ -18845,7 +19085,7 @@
               <a:t>y_reg</a:t>
             </a:r>
             <a:r>
-              <a:rPr lang="es-CL" sz="700" dirty="0">
+              <a:rPr lang="es-CL" sz="800" dirty="0">
                 <a:solidFill>
                   <a:schemeClr val="dk1"/>
                 </a:solidFill>
@@ -18860,7 +19100,7 @@
               <a:t> = </a:t>
             </a:r>
             <a:r>
-              <a:rPr lang="es-CL" sz="700" dirty="0" err="1">
+              <a:rPr lang="es-CL" sz="800" dirty="0" err="1">
                 <a:solidFill>
                   <a:schemeClr val="dk1"/>
                 </a:solidFill>
@@ -18875,7 +19115,7 @@
               <a:t>df_reg</a:t>
             </a:r>
             <a:r>
-              <a:rPr lang="es-CL" sz="700" dirty="0">
+              <a:rPr lang="es-CL" sz="800" dirty="0">
                 <a:solidFill>
                   <a:schemeClr val="dk1"/>
                 </a:solidFill>
@@ -18890,7 +19130,7 @@
               <a:t>['</a:t>
             </a:r>
             <a:r>
-              <a:rPr lang="es-CL" sz="700" dirty="0" err="1">
+              <a:rPr lang="es-CL" sz="800" dirty="0" err="1">
                 <a:solidFill>
                   <a:schemeClr val="dk1"/>
                 </a:solidFill>
@@ -18905,7 +19145,7 @@
               <a:t>costoatencionclp</a:t>
             </a:r>
             <a:r>
-              <a:rPr lang="es-CL" sz="700" dirty="0">
+              <a:rPr lang="es-CL" sz="800" dirty="0">
                 <a:solidFill>
                   <a:schemeClr val="dk1"/>
                 </a:solidFill>
@@ -18938,7 +19178,7 @@
               <a:buFont typeface="Arial"/>
               <a:buNone/>
             </a:pPr>
-            <a:endParaRPr lang="es-CL" sz="700" dirty="0">
+            <a:endParaRPr lang="es-CL" sz="800" dirty="0">
               <a:solidFill>
                 <a:schemeClr val="dk1"/>
               </a:solidFill>
@@ -18970,7 +19210,7 @@
               <a:buNone/>
             </a:pPr>
             <a:r>
-              <a:rPr lang="es-CL" sz="700" dirty="0">
+              <a:rPr lang="es-CL" sz="800" dirty="0">
                 <a:solidFill>
                   <a:schemeClr val="dk1"/>
                 </a:solidFill>
@@ -18985,7 +19225,7 @@
               <a:t>       </a:t>
             </a:r>
             <a:r>
-              <a:rPr lang="es-CL" sz="700" dirty="0" err="1">
+              <a:rPr lang="es-CL" sz="800" dirty="0" err="1">
                 <a:solidFill>
                   <a:schemeClr val="dk1"/>
                 </a:solidFill>
@@ -19000,7 +19240,7 @@
               <a:t>X_train_r</a:t>
             </a:r>
             <a:r>
-              <a:rPr lang="es-CL" sz="700" dirty="0">
+              <a:rPr lang="es-CL" sz="800" dirty="0">
                 <a:solidFill>
                   <a:schemeClr val="dk1"/>
                 </a:solidFill>
@@ -19015,7 +19255,7 @@
               <a:t>, </a:t>
             </a:r>
             <a:r>
-              <a:rPr lang="es-CL" sz="700" dirty="0" err="1">
+              <a:rPr lang="es-CL" sz="800" dirty="0" err="1">
                 <a:solidFill>
                   <a:schemeClr val="dk1"/>
                 </a:solidFill>
@@ -19030,7 +19270,7 @@
               <a:t>X_test_r</a:t>
             </a:r>
             <a:r>
-              <a:rPr lang="es-CL" sz="700" dirty="0">
+              <a:rPr lang="es-CL" sz="800" dirty="0">
                 <a:solidFill>
                   <a:schemeClr val="dk1"/>
                 </a:solidFill>
@@ -19045,7 +19285,7 @@
               <a:t>, </a:t>
             </a:r>
             <a:r>
-              <a:rPr lang="es-CL" sz="700" dirty="0" err="1">
+              <a:rPr lang="es-CL" sz="800" dirty="0" err="1">
                 <a:solidFill>
                   <a:schemeClr val="dk1"/>
                 </a:solidFill>
@@ -19060,7 +19300,7 @@
               <a:t>y_train_r</a:t>
             </a:r>
             <a:r>
-              <a:rPr lang="es-CL" sz="700" dirty="0">
+              <a:rPr lang="es-CL" sz="800" dirty="0">
                 <a:solidFill>
                   <a:schemeClr val="dk1"/>
                 </a:solidFill>
@@ -19075,7 +19315,7 @@
               <a:t>, </a:t>
             </a:r>
             <a:r>
-              <a:rPr lang="es-CL" sz="700" dirty="0" err="1">
+              <a:rPr lang="es-CL" sz="800" dirty="0" err="1">
                 <a:solidFill>
                   <a:schemeClr val="dk1"/>
                 </a:solidFill>
@@ -19090,7 +19330,7 @@
               <a:t>y_test_r</a:t>
             </a:r>
             <a:r>
-              <a:rPr lang="es-CL" sz="700" dirty="0">
+              <a:rPr lang="es-CL" sz="800" dirty="0">
                 <a:solidFill>
                   <a:schemeClr val="dk1"/>
                 </a:solidFill>
@@ -19105,7 +19345,7 @@
               <a:t> = </a:t>
             </a:r>
             <a:r>
-              <a:rPr lang="es-CL" sz="700" dirty="0" err="1">
+              <a:rPr lang="es-CL" sz="800" dirty="0" err="1">
                 <a:solidFill>
                   <a:schemeClr val="dk1"/>
                 </a:solidFill>
@@ -19120,7 +19360,7 @@
               <a:t>train_test_split</a:t>
             </a:r>
             <a:r>
-              <a:rPr lang="es-CL" sz="700" dirty="0">
+              <a:rPr lang="es-CL" sz="800" dirty="0">
                 <a:solidFill>
                   <a:schemeClr val="dk1"/>
                 </a:solidFill>
@@ -19154,7 +19394,7 @@
               <a:buNone/>
             </a:pPr>
             <a:r>
-              <a:rPr lang="es-CL" sz="700" dirty="0">
+              <a:rPr lang="es-CL" sz="800" dirty="0">
                 <a:solidFill>
                   <a:schemeClr val="dk1"/>
                 </a:solidFill>
@@ -19169,7 +19409,7 @@
               <a:t>           </a:t>
             </a:r>
             <a:r>
-              <a:rPr lang="es-CL" sz="700" dirty="0" err="1">
+              <a:rPr lang="es-CL" sz="800" dirty="0" err="1">
                 <a:solidFill>
                   <a:schemeClr val="dk1"/>
                 </a:solidFill>
@@ -19184,7 +19424,7 @@
               <a:t>X_reg</a:t>
             </a:r>
             <a:r>
-              <a:rPr lang="es-CL" sz="700" dirty="0">
+              <a:rPr lang="es-CL" sz="800" dirty="0">
                 <a:solidFill>
                   <a:schemeClr val="dk1"/>
                 </a:solidFill>
@@ -19199,7 +19439,7 @@
               <a:t>, </a:t>
             </a:r>
             <a:r>
-              <a:rPr lang="es-CL" sz="700" dirty="0" err="1">
+              <a:rPr lang="es-CL" sz="800" dirty="0" err="1">
                 <a:solidFill>
                   <a:schemeClr val="dk1"/>
                 </a:solidFill>
@@ -19214,7 +19454,7 @@
               <a:t>y_reg</a:t>
             </a:r>
             <a:r>
-              <a:rPr lang="es-CL" sz="700" dirty="0">
+              <a:rPr lang="es-CL" sz="800" dirty="0">
                 <a:solidFill>
                   <a:schemeClr val="dk1"/>
                 </a:solidFill>
@@ -19229,7 +19469,7 @@
               <a:t>, </a:t>
             </a:r>
             <a:r>
-              <a:rPr lang="es-CL" sz="700" dirty="0" err="1">
+              <a:rPr lang="es-CL" sz="800" dirty="0" err="1">
                 <a:solidFill>
                   <a:schemeClr val="dk1"/>
                 </a:solidFill>
@@ -19244,7 +19484,7 @@
               <a:t>test_size</a:t>
             </a:r>
             <a:r>
-              <a:rPr lang="es-CL" sz="700" dirty="0">
+              <a:rPr lang="es-CL" sz="800" dirty="0">
                 <a:solidFill>
                   <a:schemeClr val="dk1"/>
                 </a:solidFill>
@@ -19259,7 +19499,7 @@
               <a:t>=0.25, </a:t>
             </a:r>
             <a:r>
-              <a:rPr lang="es-CL" sz="700" dirty="0" err="1">
+              <a:rPr lang="es-CL" sz="800" dirty="0" err="1">
                 <a:solidFill>
                   <a:schemeClr val="dk1"/>
                 </a:solidFill>
@@ -19274,7 +19514,7 @@
               <a:t>random_state</a:t>
             </a:r>
             <a:r>
-              <a:rPr lang="es-CL" sz="700" dirty="0">
+              <a:rPr lang="es-CL" sz="800" dirty="0">
                 <a:solidFill>
                   <a:schemeClr val="dk1"/>
                 </a:solidFill>
@@ -19308,7 +19548,7 @@
               <a:buNone/>
             </a:pPr>
             <a:r>
-              <a:rPr lang="es-CL" sz="700" dirty="0">
+              <a:rPr lang="es-CL" sz="800" dirty="0">
                 <a:solidFill>
                   <a:schemeClr val="dk1"/>
                 </a:solidFill>
@@ -19341,7 +19581,7 @@
               <a:buFont typeface="Arial"/>
               <a:buNone/>
             </a:pPr>
-            <a:endParaRPr lang="es-CL" sz="700" dirty="0">
+            <a:endParaRPr lang="es-CL" sz="800" dirty="0">
               <a:solidFill>
                 <a:schemeClr val="dk1"/>
               </a:solidFill>
@@ -19373,7 +19613,7 @@
               <a:buNone/>
             </a:pPr>
             <a:r>
-              <a:rPr lang="es-CL" sz="700" dirty="0">
+              <a:rPr lang="es-CL" sz="800" dirty="0">
                 <a:solidFill>
                   <a:schemeClr val="dk1"/>
                 </a:solidFill>
@@ -19388,7 +19628,7 @@
               <a:t>       </a:t>
             </a:r>
             <a:r>
-              <a:rPr lang="es-CL" sz="700" dirty="0" err="1">
+              <a:rPr lang="es-CL" sz="800" dirty="0" err="1">
                 <a:solidFill>
                   <a:schemeClr val="dk1"/>
                 </a:solidFill>
@@ -19403,7 +19643,7 @@
               <a:t>preproceso_r</a:t>
             </a:r>
             <a:r>
-              <a:rPr lang="es-CL" sz="700" dirty="0">
+              <a:rPr lang="es-CL" sz="800" dirty="0">
                 <a:solidFill>
                   <a:schemeClr val="dk1"/>
                 </a:solidFill>
@@ -19418,7 +19658,7 @@
               <a:t> = </a:t>
             </a:r>
             <a:r>
-              <a:rPr lang="es-CL" sz="700" dirty="0" err="1">
+              <a:rPr lang="es-CL" sz="800" dirty="0" err="1">
                 <a:solidFill>
                   <a:schemeClr val="dk1"/>
                 </a:solidFill>
@@ -19433,7 +19673,7 @@
               <a:t>ColumnTransformer</a:t>
             </a:r>
             <a:r>
-              <a:rPr lang="es-CL" sz="700" dirty="0">
+              <a:rPr lang="es-CL" sz="800" dirty="0">
                 <a:solidFill>
                   <a:schemeClr val="dk1"/>
                 </a:solidFill>
@@ -19467,7 +19707,7 @@
               <a:buNone/>
             </a:pPr>
             <a:r>
-              <a:rPr lang="es-CL" sz="700" dirty="0">
+              <a:rPr lang="es-CL" sz="800" dirty="0">
                 <a:solidFill>
                   <a:schemeClr val="dk1"/>
                 </a:solidFill>
@@ -19482,7 +19722,7 @@
               <a:t>           </a:t>
             </a:r>
             <a:r>
-              <a:rPr lang="es-CL" sz="700" dirty="0" err="1">
+              <a:rPr lang="es-CL" sz="800" dirty="0" err="1">
                 <a:solidFill>
                   <a:schemeClr val="dk1"/>
                 </a:solidFill>
@@ -19497,7 +19737,7 @@
               <a:t>transformers</a:t>
             </a:r>
             <a:r>
-              <a:rPr lang="es-CL" sz="700" dirty="0">
+              <a:rPr lang="es-CL" sz="800" dirty="0">
                 <a:solidFill>
                   <a:schemeClr val="dk1"/>
                 </a:solidFill>
@@ -19512,7 +19752,7 @@
               <a:t>=[('</a:t>
             </a:r>
             <a:r>
-              <a:rPr lang="es-CL" sz="700" dirty="0" err="1">
+              <a:rPr lang="es-CL" sz="800" dirty="0" err="1">
                 <a:solidFill>
                   <a:schemeClr val="dk1"/>
                 </a:solidFill>
@@ -19527,7 +19767,7 @@
               <a:t>cat</a:t>
             </a:r>
             <a:r>
-              <a:rPr lang="es-CL" sz="700" dirty="0">
+              <a:rPr lang="es-CL" sz="800" dirty="0">
                 <a:solidFill>
                   <a:schemeClr val="dk1"/>
                 </a:solidFill>
@@ -19542,7 +19782,7 @@
               <a:t>', </a:t>
             </a:r>
             <a:r>
-              <a:rPr lang="es-CL" sz="700" dirty="0" err="1">
+              <a:rPr lang="es-CL" sz="800" dirty="0" err="1">
                 <a:solidFill>
                   <a:schemeClr val="dk1"/>
                 </a:solidFill>
@@ -19557,7 +19797,7 @@
               <a:t>OneHotEncoder</a:t>
             </a:r>
             <a:r>
-              <a:rPr lang="es-CL" sz="700" dirty="0">
+              <a:rPr lang="es-CL" sz="800" dirty="0">
                 <a:solidFill>
                   <a:schemeClr val="dk1"/>
                 </a:solidFill>
@@ -19572,7 +19812,7 @@
               <a:t>(</a:t>
             </a:r>
             <a:r>
-              <a:rPr lang="es-CL" sz="700" dirty="0" err="1">
+              <a:rPr lang="es-CL" sz="800" dirty="0" err="1">
                 <a:solidFill>
                   <a:schemeClr val="dk1"/>
                 </a:solidFill>
@@ -19587,7 +19827,7 @@
               <a:t>handle_unknown</a:t>
             </a:r>
             <a:r>
-              <a:rPr lang="es-CL" sz="700" dirty="0">
+              <a:rPr lang="es-CL" sz="800" dirty="0">
                 <a:solidFill>
                   <a:schemeClr val="dk1"/>
                 </a:solidFill>
@@ -19602,7 +19842,7 @@
               <a:t>='ignore'), </a:t>
             </a:r>
             <a:r>
-              <a:rPr lang="es-CL" sz="700" dirty="0" err="1">
+              <a:rPr lang="es-CL" sz="800" dirty="0" err="1">
                 <a:solidFill>
                   <a:schemeClr val="dk1"/>
                 </a:solidFill>
@@ -19617,7 +19857,7 @@
               <a:t>cols_modelo</a:t>
             </a:r>
             <a:r>
-              <a:rPr lang="es-CL" sz="700" dirty="0">
+              <a:rPr lang="es-CL" sz="800" dirty="0">
                 <a:solidFill>
                   <a:schemeClr val="dk1"/>
                 </a:solidFill>
@@ -19651,7 +19891,7 @@
               <a:buNone/>
             </a:pPr>
             <a:r>
-              <a:rPr lang="es-CL" sz="700" dirty="0">
+              <a:rPr lang="es-CL" sz="800" dirty="0">
                 <a:solidFill>
                   <a:schemeClr val="dk1"/>
                 </a:solidFill>
@@ -19685,7 +19925,7 @@
               <a:buNone/>
             </a:pPr>
             <a:r>
-              <a:rPr lang="es-CL" sz="700" dirty="0">
+              <a:rPr lang="es-CL" sz="800" dirty="0">
                 <a:solidFill>
                   <a:schemeClr val="dk1"/>
                 </a:solidFill>
@@ -19700,7 +19940,7 @@
               <a:t>       </a:t>
             </a:r>
             <a:r>
-              <a:rPr lang="es-CL" sz="700" dirty="0" err="1">
+              <a:rPr lang="es-CL" sz="800" dirty="0" err="1">
                 <a:solidFill>
                   <a:schemeClr val="dk1"/>
                 </a:solidFill>
@@ -19715,7 +19955,7 @@
               <a:t>modelo_r</a:t>
             </a:r>
             <a:r>
-              <a:rPr lang="es-CL" sz="700" dirty="0">
+              <a:rPr lang="es-CL" sz="800" dirty="0">
                 <a:solidFill>
                   <a:schemeClr val="dk1"/>
                 </a:solidFill>
@@ -19730,7 +19970,7 @@
               <a:t> = Pipeline(</a:t>
             </a:r>
             <a:r>
-              <a:rPr lang="es-CL" sz="700" dirty="0" err="1">
+              <a:rPr lang="es-CL" sz="800" dirty="0" err="1">
                 <a:solidFill>
                   <a:schemeClr val="dk1"/>
                 </a:solidFill>
@@ -19745,7 +19985,7 @@
               <a:t>steps</a:t>
             </a:r>
             <a:r>
-              <a:rPr lang="es-CL" sz="700" dirty="0">
+              <a:rPr lang="es-CL" sz="800" dirty="0">
                 <a:solidFill>
                   <a:schemeClr val="dk1"/>
                 </a:solidFill>
@@ -19779,7 +20019,7 @@
               <a:buNone/>
             </a:pPr>
             <a:r>
-              <a:rPr lang="es-CL" sz="700" dirty="0">
+              <a:rPr lang="es-CL" sz="800" dirty="0">
                 <a:solidFill>
                   <a:schemeClr val="dk1"/>
                 </a:solidFill>
@@ -19794,7 +20034,7 @@
               <a:t>           ('</a:t>
             </a:r>
             <a:r>
-              <a:rPr lang="es-CL" sz="700" dirty="0" err="1">
+              <a:rPr lang="es-CL" sz="800" dirty="0" err="1">
                 <a:solidFill>
                   <a:schemeClr val="dk1"/>
                 </a:solidFill>
@@ -19809,7 +20049,7 @@
               <a:t>prep</a:t>
             </a:r>
             <a:r>
-              <a:rPr lang="es-CL" sz="700" dirty="0">
+              <a:rPr lang="es-CL" sz="800" dirty="0">
                 <a:solidFill>
                   <a:schemeClr val="dk1"/>
                 </a:solidFill>
@@ -19824,7 +20064,7 @@
               <a:t>', </a:t>
             </a:r>
             <a:r>
-              <a:rPr lang="es-CL" sz="700" dirty="0" err="1">
+              <a:rPr lang="es-CL" sz="800" dirty="0" err="1">
                 <a:solidFill>
                   <a:schemeClr val="dk1"/>
                 </a:solidFill>
@@ -19839,7 +20079,7 @@
               <a:t>preproceso_r</a:t>
             </a:r>
             <a:r>
-              <a:rPr lang="es-CL" sz="700" dirty="0">
+              <a:rPr lang="es-CL" sz="800" dirty="0">
                 <a:solidFill>
                   <a:schemeClr val="dk1"/>
                 </a:solidFill>
@@ -19873,7 +20113,7 @@
               <a:buNone/>
             </a:pPr>
             <a:r>
-              <a:rPr lang="es-CL" sz="700" dirty="0">
+              <a:rPr lang="es-CL" sz="800" dirty="0">
                 <a:solidFill>
                   <a:schemeClr val="dk1"/>
                 </a:solidFill>
@@ -19888,7 +20128,7 @@
               <a:t>           ('</a:t>
             </a:r>
             <a:r>
-              <a:rPr lang="es-CL" sz="700" dirty="0" err="1">
+              <a:rPr lang="es-CL" sz="800" dirty="0" err="1">
                 <a:solidFill>
                   <a:schemeClr val="dk1"/>
                 </a:solidFill>
@@ -19903,7 +20143,7 @@
               <a:t>linreg</a:t>
             </a:r>
             <a:r>
-              <a:rPr lang="es-CL" sz="700" dirty="0">
+              <a:rPr lang="es-CL" sz="800" dirty="0">
                 <a:solidFill>
                   <a:schemeClr val="dk1"/>
                 </a:solidFill>
@@ -19918,7 +20158,7 @@
               <a:t>', </a:t>
             </a:r>
             <a:r>
-              <a:rPr lang="es-CL" sz="700" dirty="0" err="1">
+              <a:rPr lang="es-CL" sz="800" dirty="0" err="1">
                 <a:solidFill>
                   <a:schemeClr val="dk1"/>
                 </a:solidFill>
@@ -19933,7 +20173,7 @@
               <a:t>LinearRegression</a:t>
             </a:r>
             <a:r>
-              <a:rPr lang="es-CL" sz="700" dirty="0">
+              <a:rPr lang="es-CL" sz="800" dirty="0">
                 <a:solidFill>
                   <a:schemeClr val="dk1"/>
                 </a:solidFill>
@@ -19967,7 +20207,7 @@
               <a:buNone/>
             </a:pPr>
             <a:r>
-              <a:rPr lang="es-CL" sz="700" dirty="0">
+              <a:rPr lang="es-CL" sz="800" dirty="0">
                 <a:solidFill>
                   <a:schemeClr val="dk1"/>
                 </a:solidFill>
@@ -20000,7 +20240,7 @@
               <a:buFont typeface="Arial"/>
               <a:buNone/>
             </a:pPr>
-            <a:endParaRPr lang="es-CL" sz="700" dirty="0">
+            <a:endParaRPr lang="es-CL" sz="800" dirty="0">
               <a:solidFill>
                 <a:schemeClr val="dk1"/>
               </a:solidFill>
@@ -20032,7 +20272,7 @@
               <a:buNone/>
             </a:pPr>
             <a:r>
-              <a:rPr lang="es-CL" sz="700" dirty="0">
+              <a:rPr lang="es-CL" sz="800" dirty="0">
                 <a:solidFill>
                   <a:schemeClr val="dk1"/>
                 </a:solidFill>
@@ -20047,7 +20287,7 @@
               <a:t>       </a:t>
             </a:r>
             <a:r>
-              <a:rPr lang="es-CL" sz="700" dirty="0" err="1">
+              <a:rPr lang="es-CL" sz="800" dirty="0" err="1">
                 <a:solidFill>
                   <a:schemeClr val="dk1"/>
                 </a:solidFill>
@@ -20062,7 +20302,7 @@
               <a:t>modelo_r.fit</a:t>
             </a:r>
             <a:r>
-              <a:rPr lang="es-CL" sz="700" dirty="0">
+              <a:rPr lang="es-CL" sz="800" dirty="0">
                 <a:solidFill>
                   <a:schemeClr val="dk1"/>
                 </a:solidFill>
@@ -20077,7 +20317,7 @@
               <a:t>(</a:t>
             </a:r>
             <a:r>
-              <a:rPr lang="es-CL" sz="700" dirty="0" err="1">
+              <a:rPr lang="es-CL" sz="800" dirty="0" err="1">
                 <a:solidFill>
                   <a:schemeClr val="dk1"/>
                 </a:solidFill>
@@ -20092,7 +20332,7 @@
               <a:t>X_train_r</a:t>
             </a:r>
             <a:r>
-              <a:rPr lang="es-CL" sz="700" dirty="0">
+              <a:rPr lang="es-CL" sz="800" dirty="0">
                 <a:solidFill>
                   <a:schemeClr val="dk1"/>
                 </a:solidFill>
@@ -20107,7 +20347,7 @@
               <a:t>, </a:t>
             </a:r>
             <a:r>
-              <a:rPr lang="es-CL" sz="700" dirty="0" err="1">
+              <a:rPr lang="es-CL" sz="800" dirty="0" err="1">
                 <a:solidFill>
                   <a:schemeClr val="dk1"/>
                 </a:solidFill>
@@ -20122,7 +20362,7 @@
               <a:t>y_train_r</a:t>
             </a:r>
             <a:r>
-              <a:rPr lang="es-CL" sz="700" dirty="0">
+              <a:rPr lang="es-CL" sz="800" dirty="0">
                 <a:solidFill>
                   <a:schemeClr val="dk1"/>
                 </a:solidFill>
@@ -20156,7 +20396,7 @@
               <a:buNone/>
             </a:pPr>
             <a:r>
-              <a:rPr lang="es-CL" sz="700" dirty="0">
+              <a:rPr lang="es-CL" sz="800" dirty="0">
                 <a:solidFill>
                   <a:schemeClr val="dk1"/>
                 </a:solidFill>
@@ -20171,7 +20411,7 @@
               <a:t>       </a:t>
             </a:r>
             <a:r>
-              <a:rPr lang="es-CL" sz="700" dirty="0" err="1">
+              <a:rPr lang="es-CL" sz="800" dirty="0" err="1">
                 <a:solidFill>
                   <a:schemeClr val="dk1"/>
                 </a:solidFill>
@@ -20186,7 +20426,7 @@
               <a:t>y_pred_r</a:t>
             </a:r>
             <a:r>
-              <a:rPr lang="es-CL" sz="700" dirty="0">
+              <a:rPr lang="es-CL" sz="800" dirty="0">
                 <a:solidFill>
                   <a:schemeClr val="dk1"/>
                 </a:solidFill>
@@ -20201,7 +20441,7 @@
               <a:t> = </a:t>
             </a:r>
             <a:r>
-              <a:rPr lang="es-CL" sz="700" dirty="0" err="1">
+              <a:rPr lang="es-CL" sz="800" dirty="0" err="1">
                 <a:solidFill>
                   <a:schemeClr val="dk1"/>
                 </a:solidFill>
@@ -20216,7 +20456,7 @@
               <a:t>modelo_r.predict</a:t>
             </a:r>
             <a:r>
-              <a:rPr lang="es-CL" sz="700" dirty="0">
+              <a:rPr lang="es-CL" sz="800" dirty="0">
                 <a:solidFill>
                   <a:schemeClr val="dk1"/>
                 </a:solidFill>
@@ -20231,7 +20471,7 @@
               <a:t>(</a:t>
             </a:r>
             <a:r>
-              <a:rPr lang="es-CL" sz="700" dirty="0" err="1">
+              <a:rPr lang="es-CL" sz="800" dirty="0" err="1">
                 <a:solidFill>
                   <a:schemeClr val="dk1"/>
                 </a:solidFill>
@@ -20246,7 +20486,7 @@
               <a:t>X_test_r</a:t>
             </a:r>
             <a:r>
-              <a:rPr lang="es-CL" sz="700" dirty="0">
+              <a:rPr lang="es-CL" sz="800" dirty="0">
                 <a:solidFill>
                   <a:schemeClr val="dk1"/>
                 </a:solidFill>
@@ -20280,7 +20520,7 @@
               <a:buNone/>
             </a:pPr>
             <a:r>
-              <a:rPr lang="es-CL" sz="700" dirty="0">
+              <a:rPr lang="es-CL" sz="800" dirty="0">
                 <a:solidFill>
                   <a:schemeClr val="dk1"/>
                 </a:solidFill>
@@ -20295,7 +20535,7 @@
               <a:t>       r2_reg = r2_score(</a:t>
             </a:r>
             <a:r>
-              <a:rPr lang="es-CL" sz="700" dirty="0" err="1">
+              <a:rPr lang="es-CL" sz="800" dirty="0" err="1">
                 <a:solidFill>
                   <a:schemeClr val="dk1"/>
                 </a:solidFill>
@@ -20310,7 +20550,7 @@
               <a:t>y_test_r</a:t>
             </a:r>
             <a:r>
-              <a:rPr lang="es-CL" sz="700" dirty="0">
+              <a:rPr lang="es-CL" sz="800" dirty="0">
                 <a:solidFill>
                   <a:schemeClr val="dk1"/>
                 </a:solidFill>
@@ -20325,7 +20565,7 @@
               <a:t>, </a:t>
             </a:r>
             <a:r>
-              <a:rPr lang="es-CL" sz="700" dirty="0" err="1">
+              <a:rPr lang="es-CL" sz="800" dirty="0" err="1">
                 <a:solidFill>
                   <a:schemeClr val="dk1"/>
                 </a:solidFill>
@@ -20340,7 +20580,7 @@
               <a:t>y_pred_r</a:t>
             </a:r>
             <a:r>
-              <a:rPr lang="es-CL" sz="700" dirty="0">
+              <a:rPr lang="es-CL" sz="800" dirty="0">
                 <a:solidFill>
                   <a:schemeClr val="dk1"/>
                 </a:solidFill>
@@ -20373,7 +20613,7 @@
               <a:buFont typeface="Arial"/>
               <a:buNone/>
             </a:pPr>
-            <a:endParaRPr lang="es-CL" sz="700" dirty="0">
+            <a:endParaRPr lang="es-CL" sz="800" dirty="0">
               <a:solidFill>
                 <a:schemeClr val="dk1"/>
               </a:solidFill>
@@ -20405,7 +20645,7 @@
               <a:buNone/>
             </a:pPr>
             <a:r>
-              <a:rPr lang="es-CL" sz="700" dirty="0">
+              <a:rPr lang="es-CL" sz="800" dirty="0">
                 <a:solidFill>
                   <a:schemeClr val="dk1"/>
                 </a:solidFill>
@@ -20420,7 +20660,7 @@
               <a:t>       </a:t>
             </a:r>
             <a:r>
-              <a:rPr lang="es-CL" sz="700" dirty="0" err="1">
+              <a:rPr lang="es-CL" sz="800" dirty="0" err="1">
                 <a:solidFill>
                   <a:schemeClr val="dk1"/>
                 </a:solidFill>
@@ -20435,7 +20675,7 @@
               <a:t>plt.figure</a:t>
             </a:r>
             <a:r>
-              <a:rPr lang="es-CL" sz="700" dirty="0">
+              <a:rPr lang="es-CL" sz="800" dirty="0">
                 <a:solidFill>
                   <a:schemeClr val="dk1"/>
                 </a:solidFill>
@@ -20450,7 +20690,7 @@
               <a:t>(</a:t>
             </a:r>
             <a:r>
-              <a:rPr lang="es-CL" sz="700" dirty="0" err="1">
+              <a:rPr lang="es-CL" sz="800" dirty="0" err="1">
                 <a:solidFill>
                   <a:schemeClr val="dk1"/>
                 </a:solidFill>
@@ -20465,7 +20705,7 @@
               <a:t>figsize</a:t>
             </a:r>
             <a:r>
-              <a:rPr lang="es-CL" sz="700" dirty="0">
+              <a:rPr lang="es-CL" sz="800" dirty="0">
                 <a:solidFill>
                   <a:schemeClr val="dk1"/>
                 </a:solidFill>
@@ -20499,7 +20739,7 @@
               <a:buNone/>
             </a:pPr>
             <a:r>
-              <a:rPr lang="es-CL" sz="700" dirty="0">
+              <a:rPr lang="es-CL" sz="800" dirty="0">
                 <a:solidFill>
                   <a:schemeClr val="dk1"/>
                 </a:solidFill>
@@ -20514,7 +20754,7 @@
               <a:t>       </a:t>
             </a:r>
             <a:r>
-              <a:rPr lang="es-CL" sz="700" dirty="0" err="1">
+              <a:rPr lang="es-CL" sz="800" dirty="0" err="1">
                 <a:solidFill>
                   <a:schemeClr val="dk1"/>
                 </a:solidFill>
@@ -20529,7 +20769,7 @@
               <a:t>plt.scatter</a:t>
             </a:r>
             <a:r>
-              <a:rPr lang="es-CL" sz="700" dirty="0">
+              <a:rPr lang="es-CL" sz="800" dirty="0">
                 <a:solidFill>
                   <a:schemeClr val="dk1"/>
                 </a:solidFill>
@@ -20544,7 +20784,7 @@
               <a:t>(</a:t>
             </a:r>
             <a:r>
-              <a:rPr lang="es-CL" sz="700" dirty="0" err="1">
+              <a:rPr lang="es-CL" sz="800" dirty="0" err="1">
                 <a:solidFill>
                   <a:schemeClr val="dk1"/>
                 </a:solidFill>
@@ -20559,7 +20799,7 @@
               <a:t>y_test_r</a:t>
             </a:r>
             <a:r>
-              <a:rPr lang="es-CL" sz="700" dirty="0">
+              <a:rPr lang="es-CL" sz="800" dirty="0">
                 <a:solidFill>
                   <a:schemeClr val="dk1"/>
                 </a:solidFill>
@@ -20574,7 +20814,7 @@
               <a:t>, </a:t>
             </a:r>
             <a:r>
-              <a:rPr lang="es-CL" sz="700" dirty="0" err="1">
+              <a:rPr lang="es-CL" sz="800" dirty="0" err="1">
                 <a:solidFill>
                   <a:schemeClr val="dk1"/>
                 </a:solidFill>
@@ -20589,7 +20829,7 @@
               <a:t>y_pred_r</a:t>
             </a:r>
             <a:r>
-              <a:rPr lang="es-CL" sz="700" dirty="0">
+              <a:rPr lang="es-CL" sz="800" dirty="0">
                 <a:solidFill>
                   <a:schemeClr val="dk1"/>
                 </a:solidFill>
@@ -20604,7 +20844,7 @@
               <a:t>, </a:t>
             </a:r>
             <a:r>
-              <a:rPr lang="es-CL" sz="700" dirty="0" err="1">
+              <a:rPr lang="es-CL" sz="800" dirty="0" err="1">
                 <a:solidFill>
                   <a:schemeClr val="dk1"/>
                 </a:solidFill>
@@ -20619,7 +20859,7 @@
               <a:t>alpha</a:t>
             </a:r>
             <a:r>
-              <a:rPr lang="es-CL" sz="700" dirty="0">
+              <a:rPr lang="es-CL" sz="800" dirty="0">
                 <a:solidFill>
                   <a:schemeClr val="dk1"/>
                 </a:solidFill>
@@ -20634,7 +20874,7 @@
               <a:t>=0.35, color='#3a86ff', </a:t>
             </a:r>
             <a:r>
-              <a:rPr lang="es-CL" sz="700" dirty="0" err="1">
+              <a:rPr lang="es-CL" sz="800" dirty="0" err="1">
                 <a:solidFill>
                   <a:schemeClr val="dk1"/>
                 </a:solidFill>
@@ -20649,7 +20889,7 @@
               <a:t>edgecolor</a:t>
             </a:r>
             <a:r>
-              <a:rPr lang="es-CL" sz="700" dirty="0">
+              <a:rPr lang="es-CL" sz="800" dirty="0">
                 <a:solidFill>
                   <a:schemeClr val="dk1"/>
                 </a:solidFill>
@@ -20664,7 +20904,7 @@
               <a:t>='</a:t>
             </a:r>
             <a:r>
-              <a:rPr lang="es-CL" sz="700" dirty="0" err="1">
+              <a:rPr lang="es-CL" sz="800" dirty="0" err="1">
                 <a:solidFill>
                   <a:schemeClr val="dk1"/>
                 </a:solidFill>
@@ -20679,7 +20919,7 @@
               <a:t>none</a:t>
             </a:r>
             <a:r>
-              <a:rPr lang="es-CL" sz="700" dirty="0">
+              <a:rPr lang="es-CL" sz="800" dirty="0">
                 <a:solidFill>
                   <a:schemeClr val="dk1"/>
                 </a:solidFill>
@@ -20713,7 +20953,7 @@
               <a:buNone/>
             </a:pPr>
             <a:r>
-              <a:rPr lang="es-CL" sz="700" dirty="0">
+              <a:rPr lang="es-CL" sz="800" dirty="0">
                 <a:solidFill>
                   <a:schemeClr val="dk1"/>
                 </a:solidFill>
@@ -20728,7 +20968,7 @@
               <a:t>       </a:t>
             </a:r>
             <a:r>
-              <a:rPr lang="es-CL" sz="700" dirty="0" err="1">
+              <a:rPr lang="es-CL" sz="800" dirty="0" err="1">
                 <a:solidFill>
                   <a:schemeClr val="dk1"/>
                 </a:solidFill>
@@ -20743,7 +20983,7 @@
               <a:t>min_v</a:t>
             </a:r>
             <a:r>
-              <a:rPr lang="es-CL" sz="700" dirty="0">
+              <a:rPr lang="es-CL" sz="800" dirty="0">
                 <a:solidFill>
                   <a:schemeClr val="dk1"/>
                 </a:solidFill>
@@ -20758,7 +20998,7 @@
               <a:t> = </a:t>
             </a:r>
             <a:r>
-              <a:rPr lang="es-CL" sz="700" dirty="0" err="1">
+              <a:rPr lang="es-CL" sz="800" dirty="0" err="1">
                 <a:solidFill>
                   <a:schemeClr val="dk1"/>
                 </a:solidFill>
@@ -20773,7 +21013,7 @@
               <a:t>float</a:t>
             </a:r>
             <a:r>
-              <a:rPr lang="es-CL" sz="700" dirty="0">
+              <a:rPr lang="es-CL" sz="800" dirty="0">
                 <a:solidFill>
                   <a:schemeClr val="dk1"/>
                 </a:solidFill>
@@ -20788,7 +21028,7 @@
               <a:t>(min(</a:t>
             </a:r>
             <a:r>
-              <a:rPr lang="es-CL" sz="700" dirty="0" err="1">
+              <a:rPr lang="es-CL" sz="800" dirty="0" err="1">
                 <a:solidFill>
                   <a:schemeClr val="dk1"/>
                 </a:solidFill>
@@ -20803,7 +21043,7 @@
               <a:t>y_test_r.min</a:t>
             </a:r>
             <a:r>
-              <a:rPr lang="es-CL" sz="700" dirty="0">
+              <a:rPr lang="es-CL" sz="800" dirty="0">
                 <a:solidFill>
                   <a:schemeClr val="dk1"/>
                 </a:solidFill>
@@ -20818,7 +21058,7 @@
               <a:t>(), </a:t>
             </a:r>
             <a:r>
-              <a:rPr lang="es-CL" sz="700" dirty="0" err="1">
+              <a:rPr lang="es-CL" sz="800" dirty="0" err="1">
                 <a:solidFill>
                   <a:schemeClr val="dk1"/>
                 </a:solidFill>
@@ -20833,7 +21073,7 @@
               <a:t>y_pred_r.min</a:t>
             </a:r>
             <a:r>
-              <a:rPr lang="es-CL" sz="700" dirty="0">
+              <a:rPr lang="es-CL" sz="800" dirty="0">
                 <a:solidFill>
                   <a:schemeClr val="dk1"/>
                 </a:solidFill>
@@ -20867,7 +21107,7 @@
               <a:buNone/>
             </a:pPr>
             <a:r>
-              <a:rPr lang="es-CL" sz="700" dirty="0">
+              <a:rPr lang="es-CL" sz="800" dirty="0">
                 <a:solidFill>
                   <a:schemeClr val="dk1"/>
                 </a:solidFill>
@@ -20882,7 +21122,7 @@
               <a:t>       </a:t>
             </a:r>
             <a:r>
-              <a:rPr lang="es-CL" sz="700" dirty="0" err="1">
+              <a:rPr lang="es-CL" sz="800" dirty="0" err="1">
                 <a:solidFill>
                   <a:schemeClr val="dk1"/>
                 </a:solidFill>
@@ -20897,7 +21137,7 @@
               <a:t>max_v</a:t>
             </a:r>
             <a:r>
-              <a:rPr lang="es-CL" sz="700" dirty="0">
+              <a:rPr lang="es-CL" sz="800" dirty="0">
                 <a:solidFill>
                   <a:schemeClr val="dk1"/>
                 </a:solidFill>
@@ -20912,7 +21152,7 @@
               <a:t> = </a:t>
             </a:r>
             <a:r>
-              <a:rPr lang="es-CL" sz="700" dirty="0" err="1">
+              <a:rPr lang="es-CL" sz="800" dirty="0" err="1">
                 <a:solidFill>
                   <a:schemeClr val="dk1"/>
                 </a:solidFill>
@@ -20927,7 +21167,7 @@
               <a:t>float</a:t>
             </a:r>
             <a:r>
-              <a:rPr lang="es-CL" sz="700" dirty="0">
+              <a:rPr lang="es-CL" sz="800" dirty="0">
                 <a:solidFill>
                   <a:schemeClr val="dk1"/>
                 </a:solidFill>
@@ -20942,7 +21182,7 @@
               <a:t>(</a:t>
             </a:r>
             <a:r>
-              <a:rPr lang="es-CL" sz="700" dirty="0" err="1">
+              <a:rPr lang="es-CL" sz="800" dirty="0" err="1">
                 <a:solidFill>
                   <a:schemeClr val="dk1"/>
                 </a:solidFill>
@@ -20957,7 +21197,7 @@
               <a:t>max</a:t>
             </a:r>
             <a:r>
-              <a:rPr lang="es-CL" sz="700" dirty="0">
+              <a:rPr lang="es-CL" sz="800" dirty="0">
                 <a:solidFill>
                   <a:schemeClr val="dk1"/>
                 </a:solidFill>
@@ -20972,7 +21212,7 @@
               <a:t>(</a:t>
             </a:r>
             <a:r>
-              <a:rPr lang="es-CL" sz="700" dirty="0" err="1">
+              <a:rPr lang="es-CL" sz="800" dirty="0" err="1">
                 <a:solidFill>
                   <a:schemeClr val="dk1"/>
                 </a:solidFill>
@@ -20987,7 +21227,7 @@
               <a:t>y_test_r.max</a:t>
             </a:r>
             <a:r>
-              <a:rPr lang="es-CL" sz="700" dirty="0">
+              <a:rPr lang="es-CL" sz="800" dirty="0">
                 <a:solidFill>
                   <a:schemeClr val="dk1"/>
                 </a:solidFill>
@@ -21002,7 +21242,7 @@
               <a:t>(), </a:t>
             </a:r>
             <a:r>
-              <a:rPr lang="es-CL" sz="700" dirty="0" err="1">
+              <a:rPr lang="es-CL" sz="800" dirty="0" err="1">
                 <a:solidFill>
                   <a:schemeClr val="dk1"/>
                 </a:solidFill>
@@ -21017,7 +21257,7 @@
               <a:t>y_pred_r.max</a:t>
             </a:r>
             <a:r>
-              <a:rPr lang="es-CL" sz="700" dirty="0">
+              <a:rPr lang="es-CL" sz="800" dirty="0">
                 <a:solidFill>
                   <a:schemeClr val="dk1"/>
                 </a:solidFill>
@@ -21051,7 +21291,7 @@
               <a:buNone/>
             </a:pPr>
             <a:r>
-              <a:rPr lang="es-CL" sz="700" dirty="0">
+              <a:rPr lang="es-CL" sz="800" dirty="0">
                 <a:solidFill>
                   <a:schemeClr val="dk1"/>
                 </a:solidFill>
@@ -21066,7 +21306,7 @@
               <a:t>       </a:t>
             </a:r>
             <a:r>
-              <a:rPr lang="es-CL" sz="700" dirty="0" err="1">
+              <a:rPr lang="es-CL" sz="800" dirty="0" err="1">
                 <a:solidFill>
                   <a:schemeClr val="dk1"/>
                 </a:solidFill>
@@ -21081,7 +21321,7 @@
               <a:t>plt.plot</a:t>
             </a:r>
             <a:r>
-              <a:rPr lang="es-CL" sz="700" dirty="0">
+              <a:rPr lang="es-CL" sz="800" dirty="0">
                 <a:solidFill>
                   <a:schemeClr val="dk1"/>
                 </a:solidFill>
@@ -21096,7 +21336,7 @@
               <a:t>([</a:t>
             </a:r>
             <a:r>
-              <a:rPr lang="es-CL" sz="700" dirty="0" err="1">
+              <a:rPr lang="es-CL" sz="800" dirty="0" err="1">
                 <a:solidFill>
                   <a:schemeClr val="dk1"/>
                 </a:solidFill>
@@ -21111,7 +21351,7 @@
               <a:t>min_v</a:t>
             </a:r>
             <a:r>
-              <a:rPr lang="es-CL" sz="700" dirty="0">
+              <a:rPr lang="es-CL" sz="800" dirty="0">
                 <a:solidFill>
                   <a:schemeClr val="dk1"/>
                 </a:solidFill>
@@ -21126,7 +21366,7 @@
               <a:t>, </a:t>
             </a:r>
             <a:r>
-              <a:rPr lang="es-CL" sz="700" dirty="0" err="1">
+              <a:rPr lang="es-CL" sz="800" dirty="0" err="1">
                 <a:solidFill>
                   <a:schemeClr val="dk1"/>
                 </a:solidFill>
@@ -21141,7 +21381,7 @@
               <a:t>max_v</a:t>
             </a:r>
             <a:r>
-              <a:rPr lang="es-CL" sz="700" dirty="0">
+              <a:rPr lang="es-CL" sz="800" dirty="0">
                 <a:solidFill>
                   <a:schemeClr val="dk1"/>
                 </a:solidFill>
@@ -21156,7 +21396,7 @@
               <a:t>], [</a:t>
             </a:r>
             <a:r>
-              <a:rPr lang="es-CL" sz="700" dirty="0" err="1">
+              <a:rPr lang="es-CL" sz="800" dirty="0" err="1">
                 <a:solidFill>
                   <a:schemeClr val="dk1"/>
                 </a:solidFill>
@@ -21171,7 +21411,7 @@
               <a:t>min_v</a:t>
             </a:r>
             <a:r>
-              <a:rPr lang="es-CL" sz="700" dirty="0">
+              <a:rPr lang="es-CL" sz="800" dirty="0">
                 <a:solidFill>
                   <a:schemeClr val="dk1"/>
                 </a:solidFill>
@@ -21186,7 +21426,7 @@
               <a:t>, </a:t>
             </a:r>
             <a:r>
-              <a:rPr lang="es-CL" sz="700" dirty="0" err="1">
+              <a:rPr lang="es-CL" sz="800" dirty="0" err="1">
                 <a:solidFill>
                   <a:schemeClr val="dk1"/>
                 </a:solidFill>
@@ -21201,7 +21441,7 @@
               <a:t>max_v</a:t>
             </a:r>
             <a:r>
-              <a:rPr lang="es-CL" sz="700" dirty="0">
+              <a:rPr lang="es-CL" sz="800" dirty="0">
                 <a:solidFill>
                   <a:schemeClr val="dk1"/>
                 </a:solidFill>
@@ -21216,7 +21456,7 @@
               <a:t>], '--', color='gray', </a:t>
             </a:r>
             <a:r>
-              <a:rPr lang="es-CL" sz="700" dirty="0" err="1">
+              <a:rPr lang="es-CL" sz="800" dirty="0" err="1">
                 <a:solidFill>
                   <a:schemeClr val="dk1"/>
                 </a:solidFill>
@@ -21231,7 +21471,7 @@
               <a:t>linewidth</a:t>
             </a:r>
             <a:r>
-              <a:rPr lang="es-CL" sz="700" dirty="0">
+              <a:rPr lang="es-CL" sz="800" dirty="0">
                 <a:solidFill>
                   <a:schemeClr val="dk1"/>
                 </a:solidFill>
@@ -21265,7 +21505,7 @@
               <a:buNone/>
             </a:pPr>
             <a:r>
-              <a:rPr lang="es-CL" sz="700" dirty="0">
+              <a:rPr lang="es-CL" sz="800" dirty="0">
                 <a:solidFill>
                   <a:schemeClr val="dk1"/>
                 </a:solidFill>
@@ -21280,7 +21520,7 @@
               <a:t>       </a:t>
             </a:r>
             <a:r>
-              <a:rPr lang="es-CL" sz="700" dirty="0" err="1">
+              <a:rPr lang="es-CL" sz="800" dirty="0" err="1">
                 <a:solidFill>
                   <a:schemeClr val="dk1"/>
                 </a:solidFill>
@@ -21295,7 +21535,7 @@
               <a:t>plt.title</a:t>
             </a:r>
             <a:r>
-              <a:rPr lang="es-CL" sz="700" dirty="0">
+              <a:rPr lang="es-CL" sz="800" dirty="0">
                 <a:solidFill>
                   <a:schemeClr val="dk1"/>
                 </a:solidFill>
@@ -21310,7 +21550,7 @@
               <a:t>(</a:t>
             </a:r>
             <a:r>
-              <a:rPr lang="es-CL" sz="700" dirty="0" err="1">
+              <a:rPr lang="es-CL" sz="800" dirty="0" err="1">
                 <a:solidFill>
                   <a:schemeClr val="dk1"/>
                 </a:solidFill>
@@ -21325,7 +21565,7 @@
               <a:t>f'Regresion</a:t>
             </a:r>
             <a:r>
-              <a:rPr lang="es-CL" sz="700" dirty="0">
+              <a:rPr lang="es-CL" sz="800" dirty="0">
                 <a:solidFill>
                   <a:schemeClr val="dk1"/>
                 </a:solidFill>
@@ -21359,7 +21599,7 @@
               <a:buNone/>
             </a:pPr>
             <a:r>
-              <a:rPr lang="es-CL" sz="700" dirty="0">
+              <a:rPr lang="es-CL" sz="800" dirty="0">
                 <a:solidFill>
                   <a:schemeClr val="dk1"/>
                 </a:solidFill>
@@ -21374,7 +21614,7 @@
               <a:t>       </a:t>
             </a:r>
             <a:r>
-              <a:rPr lang="es-CL" sz="700" dirty="0" err="1">
+              <a:rPr lang="es-CL" sz="800" dirty="0" err="1">
                 <a:solidFill>
                   <a:schemeClr val="dk1"/>
                 </a:solidFill>
@@ -21389,7 +21629,7 @@
               <a:t>plt.xlabel</a:t>
             </a:r>
             <a:r>
-              <a:rPr lang="es-CL" sz="700" dirty="0">
+              <a:rPr lang="es-CL" sz="800" dirty="0">
                 <a:solidFill>
                   <a:schemeClr val="dk1"/>
                 </a:solidFill>
@@ -21423,7 +21663,7 @@
               <a:buNone/>
             </a:pPr>
             <a:r>
-              <a:rPr lang="es-CL" sz="700" dirty="0">
+              <a:rPr lang="es-CL" sz="800" dirty="0">
                 <a:solidFill>
                   <a:schemeClr val="dk1"/>
                 </a:solidFill>
@@ -21438,7 +21678,7 @@
               <a:t>       </a:t>
             </a:r>
             <a:r>
-              <a:rPr lang="es-CL" sz="700" dirty="0" err="1">
+              <a:rPr lang="es-CL" sz="800" dirty="0" err="1">
                 <a:solidFill>
                   <a:schemeClr val="dk1"/>
                 </a:solidFill>
@@ -21453,7 +21693,7 @@
               <a:t>plt.ylabel</a:t>
             </a:r>
             <a:r>
-              <a:rPr lang="es-CL" sz="700" dirty="0">
+              <a:rPr lang="es-CL" sz="800" dirty="0">
                 <a:solidFill>
                   <a:schemeClr val="dk1"/>
                 </a:solidFill>
@@ -21487,7 +21727,7 @@
               <a:buNone/>
             </a:pPr>
             <a:r>
-              <a:rPr lang="es-CL" sz="700" dirty="0">
+              <a:rPr lang="es-CL" sz="800" dirty="0">
                 <a:solidFill>
                   <a:schemeClr val="dk1"/>
                 </a:solidFill>
@@ -21502,7 +21742,7 @@
               <a:t>       </a:t>
             </a:r>
             <a:r>
-              <a:rPr lang="es-CL" sz="700" dirty="0" err="1">
+              <a:rPr lang="es-CL" sz="800" dirty="0" err="1">
                 <a:solidFill>
                   <a:schemeClr val="dk1"/>
                 </a:solidFill>
@@ -21517,7 +21757,7 @@
               <a:t>plt.tight_layout</a:t>
             </a:r>
             <a:r>
-              <a:rPr lang="es-CL" sz="700" dirty="0">
+              <a:rPr lang="es-CL" sz="800" dirty="0">
                 <a:solidFill>
                   <a:schemeClr val="dk1"/>
                 </a:solidFill>
@@ -21551,7 +21791,7 @@
               <a:buNone/>
             </a:pPr>
             <a:r>
-              <a:rPr lang="es-CL" sz="700" dirty="0">
+              <a:rPr lang="es-CL" sz="800" dirty="0">
                 <a:solidFill>
                   <a:schemeClr val="dk1"/>
                 </a:solidFill>
@@ -21566,7 +21806,7 @@
               <a:t>       </a:t>
             </a:r>
             <a:r>
-              <a:rPr lang="es-CL" sz="700" dirty="0" err="1">
+              <a:rPr lang="es-CL" sz="800" dirty="0" err="1">
                 <a:solidFill>
                   <a:schemeClr val="dk1"/>
                 </a:solidFill>
@@ -21581,7 +21821,7 @@
               <a:t>plt.show</a:t>
             </a:r>
             <a:r>
-              <a:rPr lang="es-CL" sz="700" dirty="0">
+              <a:rPr lang="es-CL" sz="800" dirty="0">
                 <a:solidFill>
                   <a:schemeClr val="dk1"/>
                 </a:solidFill>
@@ -21614,7 +21854,7 @@
               <a:buFont typeface="Arial"/>
               <a:buNone/>
             </a:pPr>
-            <a:endParaRPr lang="es-CL" sz="700" dirty="0">
+            <a:endParaRPr lang="es-CL" sz="800" dirty="0">
               <a:solidFill>
                 <a:schemeClr val="dk1"/>
               </a:solidFill>
@@ -21646,7 +21886,7 @@
               <a:buNone/>
             </a:pPr>
             <a:r>
-              <a:rPr lang="es-CL" sz="700" dirty="0">
+              <a:rPr lang="es-CL" sz="800" dirty="0">
                 <a:solidFill>
                   <a:schemeClr val="dk1"/>
                 </a:solidFill>
@@ -21661,7 +21901,7 @@
               <a:t>       </a:t>
             </a:r>
             <a:r>
-              <a:rPr lang="es-CL" sz="700" dirty="0" err="1">
+              <a:rPr lang="es-CL" sz="800" dirty="0" err="1">
                 <a:solidFill>
                   <a:schemeClr val="dk1"/>
                 </a:solidFill>
@@ -21676,7 +21916,7 @@
               <a:t>print</a:t>
             </a:r>
             <a:r>
-              <a:rPr lang="es-CL" sz="700" dirty="0">
+              <a:rPr lang="es-CL" sz="800" dirty="0">
                 <a:solidFill>
                   <a:schemeClr val="dk1"/>
                 </a:solidFill>
@@ -21691,7 +21931,7 @@
               <a:t>(f'R2 de </a:t>
             </a:r>
             <a:r>
-              <a:rPr lang="es-CL" sz="700" dirty="0" err="1">
+              <a:rPr lang="es-CL" sz="800" dirty="0" err="1">
                 <a:solidFill>
                   <a:schemeClr val="dk1"/>
                 </a:solidFill>
@@ -21706,7 +21946,7 @@
               <a:t>regresion</a:t>
             </a:r>
             <a:r>
-              <a:rPr lang="es-CL" sz="700" dirty="0">
+              <a:rPr lang="es-CL" sz="800" dirty="0">
                 <a:solidFill>
                   <a:schemeClr val="dk1"/>
                 </a:solidFill>
@@ -21740,7 +21980,7 @@
               <a:buNone/>
             </a:pPr>
             <a:r>
-              <a:rPr lang="es-CL" sz="700" dirty="0">
+              <a:rPr lang="es-CL" sz="800" dirty="0">
                 <a:solidFill>
                   <a:schemeClr val="dk1"/>
                 </a:solidFill>
@@ -21755,7 +21995,7 @@
               <a:t>   </a:t>
             </a:r>
             <a:r>
-              <a:rPr lang="es-CL" sz="700" dirty="0" err="1">
+              <a:rPr lang="es-CL" sz="800" dirty="0" err="1">
                 <a:solidFill>
                   <a:schemeClr val="dk1"/>
                 </a:solidFill>
@@ -21770,7 +22010,7 @@
               <a:t>else</a:t>
             </a:r>
             <a:r>
-              <a:rPr lang="es-CL" sz="700" dirty="0">
+              <a:rPr lang="es-CL" sz="800" dirty="0">
                 <a:solidFill>
                   <a:schemeClr val="dk1"/>
                 </a:solidFill>
@@ -21804,7 +22044,7 @@
               <a:buNone/>
             </a:pPr>
             <a:r>
-              <a:rPr lang="es-CL" sz="700" dirty="0">
+              <a:rPr lang="es-CL" sz="800" dirty="0">
                 <a:solidFill>
                   <a:schemeClr val="dk1"/>
                 </a:solidFill>
@@ -21819,7 +22059,7 @@
               <a:t>       </a:t>
             </a:r>
             <a:r>
-              <a:rPr lang="es-CL" sz="700" dirty="0" err="1">
+              <a:rPr lang="es-CL" sz="800" dirty="0" err="1">
                 <a:solidFill>
                   <a:schemeClr val="dk1"/>
                 </a:solidFill>
@@ -21834,7 +22074,7 @@
               <a:t>print</a:t>
             </a:r>
             <a:r>
-              <a:rPr lang="es-CL" sz="700" dirty="0">
+              <a:rPr lang="es-CL" sz="800" dirty="0">
                 <a:solidFill>
                   <a:schemeClr val="dk1"/>
                 </a:solidFill>
@@ -21953,7 +22193,7 @@
         <p:spPr>
           <a:xfrm>
             <a:off x="654840" y="551160"/>
-            <a:ext cx="4916520" cy="469440"/>
+            <a:ext cx="3297728" cy="469440"/>
           </a:xfrm>
           <a:prstGeom prst="rect">
             <a:avLst/>
@@ -22019,7 +22259,7 @@
         <p:spPr>
           <a:xfrm>
             <a:off x="8447760" y="149760"/>
-            <a:ext cx="3564000" cy="469440"/>
+            <a:ext cx="3564000" cy="292692"/>
           </a:xfrm>
           <a:prstGeom prst="rect">
             <a:avLst/>
@@ -22048,7 +22288,7 @@
               <a:buNone/>
             </a:pPr>
             <a:r>
-              <a:rPr lang="es-CL" sz="1200" b="1" i="0" u="none" strike="noStrike" cap="none">
+              <a:rPr lang="es-CL" sz="1200" b="1" i="0" u="none" strike="noStrike" cap="none" dirty="0">
                 <a:solidFill>
                   <a:srgbClr val="FF0000"/>
                 </a:solidFill>
@@ -22057,9 +22297,9 @@
                 <a:cs typeface="Arial"/>
                 <a:sym typeface="Arial"/>
               </a:rPr>
-              <a:t>Integrante 2-FIN: Margarita Flores (6 min)</a:t>
-            </a:r>
-            <a:endParaRPr sz="1200" b="0" i="0" u="none" strike="noStrike" cap="none">
+              <a:t>Integrante 2-FIN: Gabriel Toledo</a:t>
+            </a:r>
+            <a:endParaRPr sz="1200" b="0" i="0" u="none" strike="noStrike" cap="none" dirty="0">
               <a:solidFill>
                 <a:srgbClr val="000000"/>
               </a:solidFill>
@@ -22079,8 +22319,8 @@
         </p:nvSpPr>
         <p:spPr>
           <a:xfrm>
-            <a:off x="728450" y="1104548"/>
-            <a:ext cx="10495200" cy="6354600"/>
+            <a:off x="86240" y="1295288"/>
+            <a:ext cx="11557891" cy="3385179"/>
           </a:xfrm>
           <a:prstGeom prst="rect">
             <a:avLst/>
@@ -22109,14 +22349,78 @@
               <a:buNone/>
             </a:pPr>
             <a:r>
-              <a:rPr lang="es-CL" sz="1100">
-                <a:solidFill>
-                  <a:schemeClr val="dk1"/>
-                </a:solidFill>
-              </a:rPr>
-              <a:t>El flujo completo de ciencia de datos se ejecuto de forma ordenada y reproducible, desde la carga inicial hasta la comparacion de modelos. El proceso permitio transformar datos crudos con problemas reales en una base analitica util para tomar decisiones de negocio.</a:t>
-            </a:r>
-            <a:endParaRPr sz="1100">
+              <a:rPr lang="es-CL" dirty="0">
+                <a:solidFill>
+                  <a:schemeClr val="dk1"/>
+                </a:solidFill>
+              </a:rPr>
+              <a:t>El flujo completo de ciencia de datos se ejecuto de forma ordenada y reproducible, desde la carga inicial hasta la </a:t>
+            </a:r>
+            <a:r>
+              <a:rPr lang="es-CL" dirty="0" err="1">
+                <a:solidFill>
+                  <a:schemeClr val="dk1"/>
+                </a:solidFill>
+              </a:rPr>
+              <a:t>comparacion</a:t>
+            </a:r>
+            <a:r>
+              <a:rPr lang="es-CL" dirty="0">
+                <a:solidFill>
+                  <a:schemeClr val="dk1"/>
+                </a:solidFill>
+              </a:rPr>
+              <a:t> de modelos. El proceso </a:t>
+            </a:r>
+            <a:r>
+              <a:rPr lang="es-CL" dirty="0" err="1">
+                <a:solidFill>
+                  <a:schemeClr val="dk1"/>
+                </a:solidFill>
+              </a:rPr>
+              <a:t>permitio</a:t>
+            </a:r>
+            <a:r>
+              <a:rPr lang="es-CL" dirty="0">
+                <a:solidFill>
+                  <a:schemeClr val="dk1"/>
+                </a:solidFill>
+              </a:rPr>
+              <a:t> transformar datos crudos con problemas reales en una base </a:t>
+            </a:r>
+            <a:r>
+              <a:rPr lang="es-CL" dirty="0" err="1">
+                <a:solidFill>
+                  <a:schemeClr val="dk1"/>
+                </a:solidFill>
+              </a:rPr>
+              <a:t>analitica</a:t>
+            </a:r>
+            <a:r>
+              <a:rPr lang="es-CL" dirty="0">
+                <a:solidFill>
+                  <a:schemeClr val="dk1"/>
+                </a:solidFill>
+              </a:rPr>
+              <a:t> </a:t>
+            </a:r>
+            <a:r>
+              <a:rPr lang="es-CL" dirty="0" err="1">
+                <a:solidFill>
+                  <a:schemeClr val="dk1"/>
+                </a:solidFill>
+              </a:rPr>
+              <a:t>util</a:t>
+            </a:r>
+            <a:r>
+              <a:rPr lang="es-CL" dirty="0">
+                <a:solidFill>
+                  <a:schemeClr val="dk1"/>
+                </a:solidFill>
+              </a:rPr>
+              <a:t> para tomar decisiones de negocio.</a:t>
+            </a:r>
+            <a:endParaRPr dirty="0">
               <a:solidFill>
                 <a:schemeClr val="dk1"/>
               </a:solidFill>
@@ -22135,7 +22439,7 @@
               </a:spcAft>
               <a:buNone/>
             </a:pPr>
-            <a:endParaRPr sz="1100">
+            <a:endParaRPr dirty="0">
               <a:solidFill>
                 <a:schemeClr val="dk1"/>
               </a:solidFill>
@@ -22155,14 +22459,14 @@
               <a:buNone/>
             </a:pPr>
             <a:r>
-              <a:rPr lang="es-CL" sz="1100">
+              <a:rPr lang="es-CL" dirty="0">
                 <a:solidFill>
                   <a:schemeClr val="dk1"/>
                 </a:solidFill>
               </a:rPr>
               <a:t>Resumen del proceso</a:t>
             </a:r>
-            <a:endParaRPr sz="1100">
+            <a:endParaRPr dirty="0">
               <a:solidFill>
                 <a:schemeClr val="dk1"/>
               </a:solidFill>
@@ -22182,14 +22486,46 @@
               <a:buNone/>
             </a:pPr>
             <a:r>
-              <a:rPr lang="es-CL" sz="1100">
-                <a:solidFill>
-                  <a:schemeClr val="dk1"/>
-                </a:solidFill>
-              </a:rPr>
-              <a:t>- Carga y diagnostico de datos crudos: se identificaron problemas de calidad como duplicados, valores nulos, categorias inconsistentes y variables con distribuciones atipicas.</a:t>
-            </a:r>
-            <a:endParaRPr sz="1100">
+              <a:rPr lang="es-CL" dirty="0">
+                <a:solidFill>
+                  <a:schemeClr val="dk1"/>
+                </a:solidFill>
+              </a:rPr>
+              <a:t>- Carga y diagnostico de datos crudos: se identificaron problemas de calidad como duplicados, valores nulos, </a:t>
+            </a:r>
+            <a:r>
+              <a:rPr lang="es-CL" dirty="0" err="1">
+                <a:solidFill>
+                  <a:schemeClr val="dk1"/>
+                </a:solidFill>
+              </a:rPr>
+              <a:t>categorias</a:t>
+            </a:r>
+            <a:r>
+              <a:rPr lang="es-CL" dirty="0">
+                <a:solidFill>
+                  <a:schemeClr val="dk1"/>
+                </a:solidFill>
+              </a:rPr>
+              <a:t> inconsistentes y variables con distribuciones </a:t>
+            </a:r>
+            <a:r>
+              <a:rPr lang="es-CL" dirty="0" err="1">
+                <a:solidFill>
+                  <a:schemeClr val="dk1"/>
+                </a:solidFill>
+              </a:rPr>
+              <a:t>atipicas</a:t>
+            </a:r>
+            <a:r>
+              <a:rPr lang="es-CL" dirty="0">
+                <a:solidFill>
+                  <a:schemeClr val="dk1"/>
+                </a:solidFill>
+              </a:rPr>
+              <a:t>.</a:t>
+            </a:r>
+            <a:endParaRPr dirty="0">
               <a:solidFill>
                 <a:schemeClr val="dk1"/>
               </a:solidFill>
@@ -22209,14 +22545,62 @@
               <a:buNone/>
             </a:pPr>
             <a:r>
-              <a:rPr lang="es-CL" sz="1100">
-                <a:solidFill>
-                  <a:schemeClr val="dk1"/>
-                </a:solidFill>
-              </a:rPr>
-              <a:t>- Limpieza sistematica: se eliminaron duplicados, se corrigieron outliers, se imputaron valores faltantes con la mediana y se estandarizaron categorias relevantes.</a:t>
-            </a:r>
-            <a:endParaRPr sz="1100">
+              <a:rPr lang="es-CL" dirty="0">
+                <a:solidFill>
+                  <a:schemeClr val="dk1"/>
+                </a:solidFill>
+              </a:rPr>
+              <a:t>- Limpieza </a:t>
+            </a:r>
+            <a:r>
+              <a:rPr lang="es-CL" dirty="0" err="1">
+                <a:solidFill>
+                  <a:schemeClr val="dk1"/>
+                </a:solidFill>
+              </a:rPr>
+              <a:t>sistematica</a:t>
+            </a:r>
+            <a:r>
+              <a:rPr lang="es-CL" dirty="0">
+                <a:solidFill>
+                  <a:schemeClr val="dk1"/>
+                </a:solidFill>
+              </a:rPr>
+              <a:t>: se eliminaron duplicados, se corrigieron </a:t>
+            </a:r>
+            <a:r>
+              <a:rPr lang="es-CL" dirty="0" err="1">
+                <a:solidFill>
+                  <a:schemeClr val="dk1"/>
+                </a:solidFill>
+              </a:rPr>
+              <a:t>outliers</a:t>
+            </a:r>
+            <a:r>
+              <a:rPr lang="es-CL" dirty="0">
+                <a:solidFill>
+                  <a:schemeClr val="dk1"/>
+                </a:solidFill>
+              </a:rPr>
+              <a:t>, se imputaron valores faltantes con la mediana y se estandarizaron </a:t>
+            </a:r>
+            <a:r>
+              <a:rPr lang="es-CL" dirty="0" err="1">
+                <a:solidFill>
+                  <a:schemeClr val="dk1"/>
+                </a:solidFill>
+              </a:rPr>
+              <a:t>categorias</a:t>
+            </a:r>
+            <a:r>
+              <a:rPr lang="es-CL" dirty="0">
+                <a:solidFill>
+                  <a:schemeClr val="dk1"/>
+                </a:solidFill>
+              </a:rPr>
+              <a:t> relevantes.</a:t>
+            </a:r>
+            <a:endParaRPr dirty="0">
               <a:solidFill>
                 <a:schemeClr val="dk1"/>
               </a:solidFill>
@@ -22236,14 +22620,62 @@
               <a:buNone/>
             </a:pPr>
             <a:r>
-              <a:rPr lang="es-CL" sz="1100">
-                <a:solidFill>
-                  <a:schemeClr val="dk1"/>
-                </a:solidFill>
-              </a:rPr>
-              <a:t>- Ingenieria de caracteristicas: se crearon nuevas variables con sentido de negocio para mejorar la capacidad explicativa del analisis.</a:t>
-            </a:r>
-            <a:endParaRPr sz="1100">
+              <a:rPr lang="es-CL" dirty="0">
+                <a:solidFill>
+                  <a:schemeClr val="dk1"/>
+                </a:solidFill>
+              </a:rPr>
+              <a:t>- </a:t>
+            </a:r>
+            <a:r>
+              <a:rPr lang="es-CL" dirty="0" err="1">
+                <a:solidFill>
+                  <a:schemeClr val="dk1"/>
+                </a:solidFill>
+              </a:rPr>
+              <a:t>Ingenieria</a:t>
+            </a:r>
+            <a:r>
+              <a:rPr lang="es-CL" dirty="0">
+                <a:solidFill>
+                  <a:schemeClr val="dk1"/>
+                </a:solidFill>
+              </a:rPr>
+              <a:t> de </a:t>
+            </a:r>
+            <a:r>
+              <a:rPr lang="es-CL" dirty="0" err="1">
+                <a:solidFill>
+                  <a:schemeClr val="dk1"/>
+                </a:solidFill>
+              </a:rPr>
+              <a:t>caracteristicas</a:t>
+            </a:r>
+            <a:r>
+              <a:rPr lang="es-CL" dirty="0">
+                <a:solidFill>
+                  <a:schemeClr val="dk1"/>
+                </a:solidFill>
+              </a:rPr>
+              <a:t>: se crearon nuevas variables con sentido de negocio para mejorar la capacidad explicativa del </a:t>
+            </a:r>
+            <a:r>
+              <a:rPr lang="es-CL" dirty="0" err="1">
+                <a:solidFill>
+                  <a:schemeClr val="dk1"/>
+                </a:solidFill>
+              </a:rPr>
+              <a:t>analisis</a:t>
+            </a:r>
+            <a:r>
+              <a:rPr lang="es-CL" dirty="0">
+                <a:solidFill>
+                  <a:schemeClr val="dk1"/>
+                </a:solidFill>
+              </a:rPr>
+              <a:t>.</a:t>
+            </a:r>
+            <a:endParaRPr dirty="0">
               <a:solidFill>
                 <a:schemeClr val="dk1"/>
               </a:solidFill>
@@ -22263,14 +22695,78 @@
               <a:buNone/>
             </a:pPr>
             <a:r>
-              <a:rPr lang="es-CL" sz="1100">
-                <a:solidFill>
-                  <a:schemeClr val="dk1"/>
-                </a:solidFill>
-              </a:rPr>
-              <a:t>- Pipeline reproducible: se implemento un flujo consistente con estandarizacion, codificacion automatica y separacion adecuada entre entrenamiento y prueba.</a:t>
-            </a:r>
-            <a:endParaRPr sz="1100">
+              <a:rPr lang="es-CL" dirty="0">
+                <a:solidFill>
+                  <a:schemeClr val="dk1"/>
+                </a:solidFill>
+              </a:rPr>
+              <a:t>- Pipeline reproducible: se implemento un flujo consistente con </a:t>
+            </a:r>
+            <a:r>
+              <a:rPr lang="es-CL" dirty="0" err="1">
+                <a:solidFill>
+                  <a:schemeClr val="dk1"/>
+                </a:solidFill>
+              </a:rPr>
+              <a:t>estandarizacion</a:t>
+            </a:r>
+            <a:r>
+              <a:rPr lang="es-CL" dirty="0">
+                <a:solidFill>
+                  <a:schemeClr val="dk1"/>
+                </a:solidFill>
+              </a:rPr>
+              <a:t>, </a:t>
+            </a:r>
+            <a:r>
+              <a:rPr lang="es-CL" dirty="0" err="1">
+                <a:solidFill>
+                  <a:schemeClr val="dk1"/>
+                </a:solidFill>
+              </a:rPr>
+              <a:t>codificacion</a:t>
+            </a:r>
+            <a:r>
+              <a:rPr lang="es-CL" dirty="0">
+                <a:solidFill>
+                  <a:schemeClr val="dk1"/>
+                </a:solidFill>
+              </a:rPr>
+              <a:t> </a:t>
+            </a:r>
+            <a:r>
+              <a:rPr lang="es-CL" dirty="0" err="1">
+                <a:solidFill>
+                  <a:schemeClr val="dk1"/>
+                </a:solidFill>
+              </a:rPr>
+              <a:t>automatica</a:t>
+            </a:r>
+            <a:r>
+              <a:rPr lang="es-CL" dirty="0">
+                <a:solidFill>
+                  <a:schemeClr val="dk1"/>
+                </a:solidFill>
+              </a:rPr>
+              <a:t> y </a:t>
+            </a:r>
+            <a:r>
+              <a:rPr lang="es-CL" dirty="0" err="1">
+                <a:solidFill>
+                  <a:schemeClr val="dk1"/>
+                </a:solidFill>
+              </a:rPr>
+              <a:t>separacion</a:t>
+            </a:r>
+            <a:r>
+              <a:rPr lang="es-CL" dirty="0">
+                <a:solidFill>
+                  <a:schemeClr val="dk1"/>
+                </a:solidFill>
+              </a:rPr>
+              <a:t> adecuada entre entrenamiento y prueba.</a:t>
+            </a:r>
+            <a:endParaRPr dirty="0">
               <a:solidFill>
                 <a:schemeClr val="dk1"/>
               </a:solidFill>
@@ -22290,14 +22786,78 @@
               <a:buNone/>
             </a:pPr>
             <a:r>
-              <a:rPr lang="es-CL" sz="1100">
-                <a:solidFill>
-                  <a:schemeClr val="dk1"/>
-                </a:solidFill>
-              </a:rPr>
-              <a:t>- Analisis bias-varianza: se evaluo la complejidad del modelo para evitar tanto subajuste como sobreajuste.</a:t>
-            </a:r>
-            <a:endParaRPr sz="1100">
+              <a:rPr lang="es-CL" dirty="0">
+                <a:solidFill>
+                  <a:schemeClr val="dk1"/>
+                </a:solidFill>
+              </a:rPr>
+              <a:t>- </a:t>
+            </a:r>
+            <a:r>
+              <a:rPr lang="es-CL" dirty="0" err="1">
+                <a:solidFill>
+                  <a:schemeClr val="dk1"/>
+                </a:solidFill>
+              </a:rPr>
+              <a:t>Analisis</a:t>
+            </a:r>
+            <a:r>
+              <a:rPr lang="es-CL" dirty="0">
+                <a:solidFill>
+                  <a:schemeClr val="dk1"/>
+                </a:solidFill>
+              </a:rPr>
+              <a:t> </a:t>
+            </a:r>
+            <a:r>
+              <a:rPr lang="es-CL" dirty="0" err="1">
+                <a:solidFill>
+                  <a:schemeClr val="dk1"/>
+                </a:solidFill>
+              </a:rPr>
+              <a:t>bias</a:t>
+            </a:r>
+            <a:r>
+              <a:rPr lang="es-CL" dirty="0">
+                <a:solidFill>
+                  <a:schemeClr val="dk1"/>
+                </a:solidFill>
+              </a:rPr>
+              <a:t>-varianza: se </a:t>
+            </a:r>
+            <a:r>
+              <a:rPr lang="es-CL" dirty="0" err="1">
+                <a:solidFill>
+                  <a:schemeClr val="dk1"/>
+                </a:solidFill>
+              </a:rPr>
+              <a:t>evaluo</a:t>
+            </a:r>
+            <a:r>
+              <a:rPr lang="es-CL" dirty="0">
+                <a:solidFill>
+                  <a:schemeClr val="dk1"/>
+                </a:solidFill>
+              </a:rPr>
+              <a:t> la complejidad del modelo para evitar tanto </a:t>
+            </a:r>
+            <a:r>
+              <a:rPr lang="es-CL" dirty="0" err="1">
+                <a:solidFill>
+                  <a:schemeClr val="dk1"/>
+                </a:solidFill>
+              </a:rPr>
+              <a:t>subajuste</a:t>
+            </a:r>
+            <a:r>
+              <a:rPr lang="es-CL" dirty="0">
+                <a:solidFill>
+                  <a:schemeClr val="dk1"/>
+                </a:solidFill>
+              </a:rPr>
+              <a:t> como sobreajuste.</a:t>
+            </a:r>
+            <a:endParaRPr dirty="0">
               <a:solidFill>
                 <a:schemeClr val="dk1"/>
               </a:solidFill>
@@ -22317,441 +22877,30 @@
               <a:buNone/>
             </a:pPr>
             <a:r>
-              <a:rPr lang="es-CL" sz="1100">
-                <a:solidFill>
-                  <a:schemeClr val="dk1"/>
-                </a:solidFill>
-              </a:rPr>
-              <a:t>- Comparacion de modelos: se entrenaron, evaluaron y contrastaron 4 modelos, priorizando desempeño y estabilidad.</a:t>
-            </a:r>
-            <a:endParaRPr sz="1100">
-              <a:solidFill>
-                <a:schemeClr val="dk1"/>
-              </a:solidFill>
-            </a:endParaRPr>
-          </a:p>
-          <a:p>
-            <a:pPr marL="457200" lvl="0" indent="0" algn="l" rtl="0">
-              <a:lnSpc>
-                <a:spcPct val="101857"/>
-              </a:lnSpc>
-              <a:spcBef>
-                <a:spcPts val="0"/>
-              </a:spcBef>
-              <a:spcAft>
-                <a:spcPts val="0"/>
-              </a:spcAft>
-              <a:buNone/>
-            </a:pPr>
-            <a:endParaRPr sz="1100">
-              <a:solidFill>
-                <a:schemeClr val="dk1"/>
-              </a:solidFill>
-            </a:endParaRPr>
-          </a:p>
-          <a:p>
-            <a:pPr marL="0" lvl="0" indent="457200" algn="l" rtl="0">
-              <a:lnSpc>
-                <a:spcPct val="101857"/>
-              </a:lnSpc>
-              <a:spcBef>
-                <a:spcPts val="0"/>
-              </a:spcBef>
-              <a:spcAft>
-                <a:spcPts val="0"/>
-              </a:spcAft>
-              <a:buNone/>
-            </a:pPr>
-            <a:r>
-              <a:rPr lang="es-CL" sz="1100">
-                <a:solidFill>
-                  <a:schemeClr val="dk1"/>
-                </a:solidFill>
-              </a:rPr>
-              <a:t> Hallazgos principales</a:t>
-            </a:r>
-            <a:endParaRPr sz="1100">
-              <a:solidFill>
-                <a:schemeClr val="dk1"/>
-              </a:solidFill>
-            </a:endParaRPr>
-          </a:p>
-          <a:p>
-            <a:pPr marL="457200" lvl="0" indent="0" algn="l" rtl="0">
-              <a:lnSpc>
-                <a:spcPct val="101857"/>
-              </a:lnSpc>
-              <a:spcBef>
-                <a:spcPts val="0"/>
-              </a:spcBef>
-              <a:spcAft>
-                <a:spcPts val="0"/>
-              </a:spcAft>
-              <a:buNone/>
-            </a:pPr>
-            <a:r>
-              <a:rPr lang="es-CL" sz="1100">
-                <a:solidFill>
-                  <a:schemeClr val="dk1"/>
-                </a:solidFill>
-              </a:rPr>
-              <a:t>1. La limpieza de datos fue critica para mejorar la confiabilidad del analisis y reducir ruido en el modelado.</a:t>
-            </a:r>
-            <a:endParaRPr sz="1100">
-              <a:solidFill>
-                <a:schemeClr val="dk1"/>
-              </a:solidFill>
-            </a:endParaRPr>
-          </a:p>
-          <a:p>
-            <a:pPr marL="457200" lvl="0" indent="0" algn="l" rtl="0">
-              <a:lnSpc>
-                <a:spcPct val="101857"/>
-              </a:lnSpc>
-              <a:spcBef>
-                <a:spcPts val="0"/>
-              </a:spcBef>
-              <a:spcAft>
-                <a:spcPts val="0"/>
-              </a:spcAft>
-              <a:buNone/>
-            </a:pPr>
-            <a:r>
-              <a:rPr lang="es-CL" sz="1100">
-                <a:solidFill>
-                  <a:schemeClr val="dk1"/>
-                </a:solidFill>
-              </a:rPr>
-              <a:t>2. Las nuevas variables aportaron valor predictivo, al capturar patrones que no eran visibles en el dataset original.</a:t>
-            </a:r>
-            <a:endParaRPr sz="1100">
-              <a:solidFill>
-                <a:schemeClr val="dk1"/>
-              </a:solidFill>
-            </a:endParaRPr>
-          </a:p>
-          <a:p>
-            <a:pPr marL="457200" lvl="0" indent="0" algn="l" rtl="0">
-              <a:lnSpc>
-                <a:spcPct val="101857"/>
-              </a:lnSpc>
-              <a:spcBef>
-                <a:spcPts val="0"/>
-              </a:spcBef>
-              <a:spcAft>
-                <a:spcPts val="0"/>
-              </a:spcAft>
-              <a:buNone/>
-            </a:pPr>
-            <a:r>
-              <a:rPr lang="es-CL" sz="1100">
-                <a:solidFill>
-                  <a:schemeClr val="dk1"/>
-                </a:solidFill>
-              </a:rPr>
-              <a:t>3. El pipeline automatizado mejoro la reproducibilidad, facilitando futuras actualizaciones del modelo.</a:t>
-            </a:r>
-            <a:endParaRPr sz="1100">
-              <a:solidFill>
-                <a:schemeClr val="dk1"/>
-              </a:solidFill>
-            </a:endParaRPr>
-          </a:p>
-          <a:p>
-            <a:pPr marL="457200" lvl="0" indent="0" algn="l" rtl="0">
-              <a:lnSpc>
-                <a:spcPct val="101857"/>
-              </a:lnSpc>
-              <a:spcBef>
-                <a:spcPts val="0"/>
-              </a:spcBef>
-              <a:spcAft>
-                <a:spcPts val="0"/>
-              </a:spcAft>
-              <a:buNone/>
-            </a:pPr>
-            <a:r>
-              <a:rPr lang="es-CL" sz="1100">
-                <a:solidFill>
-                  <a:schemeClr val="dk1"/>
-                </a:solidFill>
-              </a:rPr>
-              <a:t>4. El analisis bias-varianza mostro el nivel de complejidad adecuado, logrando un balance razonable entre capacidad predictiva y generalizacion.</a:t>
-            </a:r>
-            <a:endParaRPr sz="1100">
-              <a:solidFill>
-                <a:schemeClr val="dk1"/>
-              </a:solidFill>
-            </a:endParaRPr>
-          </a:p>
-          <a:p>
-            <a:pPr marL="457200" lvl="0" indent="0" algn="l" rtl="0">
-              <a:lnSpc>
-                <a:spcPct val="101857"/>
-              </a:lnSpc>
-              <a:spcBef>
-                <a:spcPts val="0"/>
-              </a:spcBef>
-              <a:spcAft>
-                <a:spcPts val="0"/>
-              </a:spcAft>
-              <a:buNone/>
-            </a:pPr>
-            <a:r>
-              <a:rPr lang="es-CL" sz="1100">
-                <a:solidFill>
-                  <a:schemeClr val="dk1"/>
-                </a:solidFill>
-              </a:rPr>
-              <a:t>5. La comparacion de modelos permitio seleccionar la mejor alternativa segun las metricas definidas, evitando decisiones basadas solo en intuicion.</a:t>
-            </a:r>
-            <a:endParaRPr sz="1100">
-              <a:solidFill>
-                <a:schemeClr val="dk1"/>
-              </a:solidFill>
-            </a:endParaRPr>
-          </a:p>
-          <a:p>
-            <a:pPr marL="457200" lvl="0" indent="0" algn="l" rtl="0">
-              <a:lnSpc>
-                <a:spcPct val="101857"/>
-              </a:lnSpc>
-              <a:spcBef>
-                <a:spcPts val="0"/>
-              </a:spcBef>
-              <a:spcAft>
-                <a:spcPts val="0"/>
-              </a:spcAft>
-              <a:buNone/>
-            </a:pPr>
-            <a:endParaRPr sz="1100">
-              <a:solidFill>
-                <a:schemeClr val="dk1"/>
-              </a:solidFill>
-            </a:endParaRPr>
-          </a:p>
-          <a:p>
-            <a:pPr marL="457200" lvl="0" indent="0" algn="l" rtl="0">
-              <a:lnSpc>
-                <a:spcPct val="101857"/>
-              </a:lnSpc>
-              <a:spcBef>
-                <a:spcPts val="0"/>
-              </a:spcBef>
-              <a:spcAft>
-                <a:spcPts val="0"/>
-              </a:spcAft>
-              <a:buNone/>
-            </a:pPr>
-            <a:r>
-              <a:rPr lang="es-CL" sz="1100">
-                <a:solidFill>
-                  <a:schemeClr val="dk1"/>
-                </a:solidFill>
-              </a:rPr>
-              <a:t> Conclusion ejecutiva</a:t>
-            </a:r>
-            <a:endParaRPr sz="1100">
-              <a:solidFill>
-                <a:schemeClr val="dk1"/>
-              </a:solidFill>
-            </a:endParaRPr>
-          </a:p>
-          <a:p>
-            <a:pPr marL="457200" lvl="0" indent="0" algn="l" rtl="0">
-              <a:lnSpc>
-                <a:spcPct val="101857"/>
-              </a:lnSpc>
-              <a:spcBef>
-                <a:spcPts val="0"/>
-              </a:spcBef>
-              <a:spcAft>
-                <a:spcPts val="0"/>
-              </a:spcAft>
-              <a:buNone/>
-            </a:pPr>
-            <a:r>
-              <a:rPr lang="es-CL" sz="1100">
-                <a:solidFill>
-                  <a:schemeClr val="dk1"/>
-                </a:solidFill>
-              </a:rPr>
-              <a:t>El analisis confirma que un proceso riguroso de preparacion de datos, junto con una seleccion cuidadosa de variables y modelos, permite construir una solucion analitica solida para clientes de telecomunicaciones. En terminos de negocio, este enfoque mejora la interpretacion de los patrones observados, fortalece la capacidad predictiva y entrega una base confiable para apoyar decisiones comerciales y operativas.</a:t>
-            </a:r>
-            <a:endParaRPr sz="1100">
-              <a:solidFill>
-                <a:schemeClr val="dk1"/>
-              </a:solidFill>
-            </a:endParaRPr>
-          </a:p>
-          <a:p>
-            <a:pPr marL="457200" lvl="0" indent="0" algn="l" rtl="0">
-              <a:lnSpc>
-                <a:spcPct val="101857"/>
-              </a:lnSpc>
-              <a:spcBef>
-                <a:spcPts val="0"/>
-              </a:spcBef>
-              <a:spcAft>
-                <a:spcPts val="0"/>
-              </a:spcAft>
-              <a:buNone/>
-            </a:pPr>
-            <a:endParaRPr sz="1100">
-              <a:solidFill>
-                <a:schemeClr val="dk1"/>
-              </a:solidFill>
-            </a:endParaRPr>
-          </a:p>
-          <a:p>
-            <a:pPr marL="457200" lvl="0" indent="0" algn="l" rtl="0">
-              <a:lnSpc>
-                <a:spcPct val="101857"/>
-              </a:lnSpc>
-              <a:spcBef>
-                <a:spcPts val="0"/>
-              </a:spcBef>
-              <a:spcAft>
-                <a:spcPts val="0"/>
-              </a:spcAft>
-              <a:buNone/>
-            </a:pPr>
-            <a:r>
-              <a:rPr lang="es-CL" sz="1100">
-                <a:solidFill>
-                  <a:schemeClr val="dk1"/>
-                </a:solidFill>
-              </a:rPr>
-              <a:t>Recomendación final</a:t>
-            </a:r>
-            <a:endParaRPr sz="1100">
-              <a:solidFill>
-                <a:schemeClr val="dk1"/>
-              </a:solidFill>
-            </a:endParaRPr>
-          </a:p>
-          <a:p>
-            <a:pPr marL="457200" lvl="0" indent="0" algn="l" rtl="0">
-              <a:lnSpc>
-                <a:spcPct val="101857"/>
-              </a:lnSpc>
-              <a:spcBef>
-                <a:spcPts val="0"/>
-              </a:spcBef>
-              <a:spcAft>
-                <a:spcPts val="0"/>
-              </a:spcAft>
-              <a:buNone/>
-            </a:pPr>
-            <a:r>
-              <a:rPr lang="es-CL" sz="1100">
-                <a:solidFill>
-                  <a:schemeClr val="dk1"/>
-                </a:solidFill>
-              </a:rPr>
-              <a:t>Para la siguiente iteracion, se sugiere:</a:t>
-            </a:r>
-            <a:endParaRPr sz="1100">
-              <a:solidFill>
-                <a:schemeClr val="dk1"/>
-              </a:solidFill>
-            </a:endParaRPr>
-          </a:p>
-          <a:p>
-            <a:pPr marL="457200" lvl="0" indent="0" algn="l" rtl="0">
-              <a:lnSpc>
-                <a:spcPct val="101857"/>
-              </a:lnSpc>
-              <a:spcBef>
-                <a:spcPts val="0"/>
-              </a:spcBef>
-              <a:spcAft>
-                <a:spcPts val="0"/>
-              </a:spcAft>
-              <a:buNone/>
-            </a:pPr>
-            <a:r>
-              <a:rPr lang="es-CL" sz="1100">
-                <a:solidFill>
-                  <a:schemeClr val="dk1"/>
-                </a:solidFill>
-              </a:rPr>
-              <a:t>- incorporar mas variables de comportamiento del cliente,</a:t>
-            </a:r>
-            <a:endParaRPr sz="1100">
-              <a:solidFill>
-                <a:schemeClr val="dk1"/>
-              </a:solidFill>
-            </a:endParaRPr>
-          </a:p>
-          <a:p>
-            <a:pPr marL="457200" lvl="0" indent="0" algn="l" rtl="0">
-              <a:lnSpc>
-                <a:spcPct val="101857"/>
-              </a:lnSpc>
-              <a:spcBef>
-                <a:spcPts val="0"/>
-              </a:spcBef>
-              <a:spcAft>
-                <a:spcPts val="0"/>
-              </a:spcAft>
-              <a:buNone/>
-            </a:pPr>
-            <a:r>
-              <a:rPr lang="es-CL" sz="1100">
-                <a:solidFill>
-                  <a:schemeClr val="dk1"/>
-                </a:solidFill>
-              </a:rPr>
-              <a:t>- probar modelos no lineales adicionales,</a:t>
-            </a:r>
-            <a:endParaRPr sz="1100">
-              <a:solidFill>
-                <a:schemeClr val="dk1"/>
-              </a:solidFill>
-            </a:endParaRPr>
-          </a:p>
-          <a:p>
-            <a:pPr marL="457200" lvl="0" indent="0" algn="l" rtl="0">
-              <a:lnSpc>
-                <a:spcPct val="101857"/>
-              </a:lnSpc>
-              <a:spcBef>
-                <a:spcPts val="0"/>
-              </a:spcBef>
-              <a:spcAft>
-                <a:spcPts val="0"/>
-              </a:spcAft>
-              <a:buNone/>
-            </a:pPr>
-            <a:r>
-              <a:rPr lang="es-CL" sz="1100">
-                <a:solidFill>
-                  <a:schemeClr val="dk1"/>
-                </a:solidFill>
-              </a:rPr>
-              <a:t>- y validar el desempeño con metricas orientadas al objetivo de negocio.</a:t>
-            </a:r>
-            <a:endParaRPr sz="1100">
-              <a:solidFill>
-                <a:schemeClr val="dk1"/>
-              </a:solidFill>
-            </a:endParaRPr>
-          </a:p>
-          <a:p>
-            <a:pPr marL="457200" marR="0" lvl="0" indent="0" algn="l" rtl="0">
-              <a:lnSpc>
-                <a:spcPct val="101857"/>
-              </a:lnSpc>
-              <a:spcBef>
-                <a:spcPts val="0"/>
-              </a:spcBef>
-              <a:spcAft>
-                <a:spcPts val="0"/>
-              </a:spcAft>
-              <a:buNone/>
-            </a:pPr>
-            <a:endParaRPr>
+              <a:rPr lang="es-CL" dirty="0">
+                <a:solidFill>
+                  <a:schemeClr val="dk1"/>
+                </a:solidFill>
+              </a:rPr>
+              <a:t>- </a:t>
+            </a:r>
+            <a:r>
+              <a:rPr lang="es-CL" dirty="0" err="1">
+                <a:solidFill>
+                  <a:schemeClr val="dk1"/>
+                </a:solidFill>
+              </a:rPr>
+              <a:t>Comparacion</a:t>
+            </a:r>
+            <a:r>
+              <a:rPr lang="es-CL" dirty="0">
+                <a:solidFill>
+                  <a:schemeClr val="dk1"/>
+                </a:solidFill>
+              </a:rPr>
+              <a:t> de modelos: se entrenaron, evaluaron y contrastaron 4 modelos, priorizando desempeño y estabilidad.</a:t>
+            </a:r>
+            <a:endParaRPr dirty="0">
               <a:solidFill>
                 <a:schemeClr val="dk1"/>
               </a:solidFill>
@@ -22771,14 +22920,14 @@
               <a:buNone/>
             </a:pPr>
             <a:br>
-              <a:rPr lang="es-CL" sz="1800" b="0" i="0" u="none" strike="noStrike" cap="none">
+              <a:rPr lang="es-CL" sz="1800" b="0" i="0" u="none" strike="noStrike" cap="none" dirty="0">
                 <a:latin typeface="Arial"/>
                 <a:ea typeface="Arial"/>
                 <a:cs typeface="Arial"/>
                 <a:sym typeface="Arial"/>
               </a:rPr>
             </a:br>
-            <a:endParaRPr sz="1800" b="0" i="0" u="none" strike="noStrike" cap="none">
+            <a:endParaRPr sz="1800" b="0" i="0" u="none" strike="noStrike" cap="none" dirty="0">
               <a:solidFill>
                 <a:srgbClr val="000000"/>
               </a:solidFill>
@@ -22799,6 +22948,709 @@
 </file>
 
 <file path=ppt/slides/slide13.xml><?xml version="1.0" encoding="utf-8"?>
+<p:sld xmlns:a="http://schemas.openxmlformats.org/drawingml/2006/main" xmlns:r="http://schemas.openxmlformats.org/officeDocument/2006/relationships" xmlns:p="http://schemas.openxmlformats.org/presentationml/2006/main">
+  <p:cSld>
+    <p:spTree>
+      <p:nvGrpSpPr>
+        <p:cNvPr id="1" name=""/>
+        <p:cNvGrpSpPr/>
+        <p:nvPr/>
+      </p:nvGrpSpPr>
+      <p:grpSpPr>
+        <a:xfrm>
+          <a:off x="0" y="0"/>
+          <a:ext cx="0" cy="0"/>
+          <a:chOff x="0" y="0"/>
+          <a:chExt cx="0" cy="0"/>
+        </a:xfrm>
+      </p:grpSpPr>
+      <p:sp>
+        <p:nvSpPr>
+          <p:cNvPr id="3" name="CuadroTexto 2">
+            <a:extLst>
+              <a:ext uri="{FF2B5EF4-FFF2-40B4-BE49-F238E27FC236}">
+                <a16:creationId xmlns:a16="http://schemas.microsoft.com/office/drawing/2014/main" id="{FF32AC9B-99F9-5259-8592-BD7100B96808}"/>
+              </a:ext>
+            </a:extLst>
+          </p:cNvPr>
+          <p:cNvSpPr txBox="1"/>
+          <p:nvPr/>
+        </p:nvSpPr>
+        <p:spPr>
+          <a:xfrm>
+            <a:off x="344130" y="973004"/>
+            <a:ext cx="11473622" cy="4473084"/>
+          </a:xfrm>
+          <a:prstGeom prst="rect">
+            <a:avLst/>
+          </a:prstGeom>
+          <a:noFill/>
+        </p:spPr>
+        <p:txBody>
+          <a:bodyPr wrap="square">
+            <a:spAutoFit/>
+          </a:bodyPr>
+          <a:lstStyle/>
+          <a:p>
+            <a:pPr marL="0" lvl="0" indent="457200" algn="l" rtl="0">
+              <a:lnSpc>
+                <a:spcPct val="101857"/>
+              </a:lnSpc>
+              <a:spcBef>
+                <a:spcPts val="0"/>
+              </a:spcBef>
+              <a:spcAft>
+                <a:spcPts val="0"/>
+              </a:spcAft>
+              <a:buNone/>
+            </a:pPr>
+            <a:r>
+              <a:rPr lang="es-ES" sz="1400" dirty="0">
+                <a:solidFill>
+                  <a:schemeClr val="dk1"/>
+                </a:solidFill>
+              </a:rPr>
+              <a:t> Hallazgos principales</a:t>
+            </a:r>
+          </a:p>
+          <a:p>
+            <a:pPr marL="457200" lvl="0" indent="0" algn="l" rtl="0">
+              <a:lnSpc>
+                <a:spcPct val="101857"/>
+              </a:lnSpc>
+              <a:spcBef>
+                <a:spcPts val="0"/>
+              </a:spcBef>
+              <a:spcAft>
+                <a:spcPts val="0"/>
+              </a:spcAft>
+              <a:buNone/>
+            </a:pPr>
+            <a:r>
+              <a:rPr lang="es-ES" sz="1400" dirty="0">
+                <a:solidFill>
+                  <a:schemeClr val="dk1"/>
+                </a:solidFill>
+              </a:rPr>
+              <a:t>1. La limpieza de datos fue critica para mejorar la confiabilidad del </a:t>
+            </a:r>
+            <a:r>
+              <a:rPr lang="es-ES" sz="1400" dirty="0" err="1">
+                <a:solidFill>
+                  <a:schemeClr val="dk1"/>
+                </a:solidFill>
+              </a:rPr>
+              <a:t>analisis</a:t>
+            </a:r>
+            <a:r>
+              <a:rPr lang="es-ES" sz="1400" dirty="0">
+                <a:solidFill>
+                  <a:schemeClr val="dk1"/>
+                </a:solidFill>
+              </a:rPr>
+              <a:t> y reducir ruido en el modelado.</a:t>
+            </a:r>
+          </a:p>
+          <a:p>
+            <a:pPr marL="457200" lvl="0" indent="0" algn="l" rtl="0">
+              <a:lnSpc>
+                <a:spcPct val="101857"/>
+              </a:lnSpc>
+              <a:spcBef>
+                <a:spcPts val="0"/>
+              </a:spcBef>
+              <a:spcAft>
+                <a:spcPts val="0"/>
+              </a:spcAft>
+              <a:buNone/>
+            </a:pPr>
+            <a:r>
+              <a:rPr lang="es-ES" sz="1400" dirty="0">
+                <a:solidFill>
+                  <a:schemeClr val="dk1"/>
+                </a:solidFill>
+              </a:rPr>
+              <a:t>2. Las nuevas variables aportaron valor predictivo, al capturar patrones que no eran visibles en el </a:t>
+            </a:r>
+            <a:r>
+              <a:rPr lang="es-ES" sz="1400" dirty="0" err="1">
+                <a:solidFill>
+                  <a:schemeClr val="dk1"/>
+                </a:solidFill>
+              </a:rPr>
+              <a:t>dataset</a:t>
+            </a:r>
+            <a:r>
+              <a:rPr lang="es-ES" sz="1400" dirty="0">
+                <a:solidFill>
+                  <a:schemeClr val="dk1"/>
+                </a:solidFill>
+              </a:rPr>
+              <a:t> original.</a:t>
+            </a:r>
+          </a:p>
+          <a:p>
+            <a:pPr marL="457200" lvl="0" indent="0" algn="l" rtl="0">
+              <a:lnSpc>
+                <a:spcPct val="101857"/>
+              </a:lnSpc>
+              <a:spcBef>
+                <a:spcPts val="0"/>
+              </a:spcBef>
+              <a:spcAft>
+                <a:spcPts val="0"/>
+              </a:spcAft>
+              <a:buNone/>
+            </a:pPr>
+            <a:r>
+              <a:rPr lang="es-ES" sz="1400" dirty="0">
+                <a:solidFill>
+                  <a:schemeClr val="dk1"/>
+                </a:solidFill>
+              </a:rPr>
+              <a:t>3. El pipeline automatizado mejoro la reproducibilidad, facilitando futuras actualizaciones del modelo.</a:t>
+            </a:r>
+          </a:p>
+          <a:p>
+            <a:pPr marL="457200" lvl="0" indent="0" algn="l" rtl="0">
+              <a:lnSpc>
+                <a:spcPct val="101857"/>
+              </a:lnSpc>
+              <a:spcBef>
+                <a:spcPts val="0"/>
+              </a:spcBef>
+              <a:spcAft>
+                <a:spcPts val="0"/>
+              </a:spcAft>
+              <a:buNone/>
+            </a:pPr>
+            <a:r>
+              <a:rPr lang="es-ES" sz="1400" dirty="0">
+                <a:solidFill>
+                  <a:schemeClr val="dk1"/>
+                </a:solidFill>
+              </a:rPr>
+              <a:t>4. El </a:t>
+            </a:r>
+            <a:r>
+              <a:rPr lang="es-ES" sz="1400" dirty="0" err="1">
+                <a:solidFill>
+                  <a:schemeClr val="dk1"/>
+                </a:solidFill>
+              </a:rPr>
+              <a:t>analisis</a:t>
+            </a:r>
+            <a:r>
+              <a:rPr lang="es-ES" sz="1400" dirty="0">
+                <a:solidFill>
+                  <a:schemeClr val="dk1"/>
+                </a:solidFill>
+              </a:rPr>
+              <a:t> </a:t>
+            </a:r>
+            <a:r>
+              <a:rPr lang="es-ES" sz="1400" dirty="0" err="1">
+                <a:solidFill>
+                  <a:schemeClr val="dk1"/>
+                </a:solidFill>
+              </a:rPr>
+              <a:t>bias</a:t>
+            </a:r>
+            <a:r>
+              <a:rPr lang="es-ES" sz="1400" dirty="0">
+                <a:solidFill>
+                  <a:schemeClr val="dk1"/>
+                </a:solidFill>
+              </a:rPr>
+              <a:t>-varianza mostro el nivel de complejidad adecuado, logrando un balance razonable entre capacidad predictiva y </a:t>
+            </a:r>
+            <a:r>
+              <a:rPr lang="es-ES" sz="1400" dirty="0" err="1">
+                <a:solidFill>
+                  <a:schemeClr val="dk1"/>
+                </a:solidFill>
+              </a:rPr>
+              <a:t>generalizacion</a:t>
+            </a:r>
+            <a:r>
+              <a:rPr lang="es-ES" sz="1400" dirty="0">
+                <a:solidFill>
+                  <a:schemeClr val="dk1"/>
+                </a:solidFill>
+              </a:rPr>
+              <a:t>.</a:t>
+            </a:r>
+          </a:p>
+          <a:p>
+            <a:pPr marL="457200" lvl="0" indent="0" algn="l" rtl="0">
+              <a:lnSpc>
+                <a:spcPct val="101857"/>
+              </a:lnSpc>
+              <a:spcBef>
+                <a:spcPts val="0"/>
+              </a:spcBef>
+              <a:spcAft>
+                <a:spcPts val="0"/>
+              </a:spcAft>
+              <a:buNone/>
+            </a:pPr>
+            <a:r>
+              <a:rPr lang="es-ES" sz="1400" dirty="0">
+                <a:solidFill>
+                  <a:schemeClr val="dk1"/>
+                </a:solidFill>
+              </a:rPr>
+              <a:t>5. La </a:t>
+            </a:r>
+            <a:r>
+              <a:rPr lang="es-ES" sz="1400" dirty="0" err="1">
+                <a:solidFill>
+                  <a:schemeClr val="dk1"/>
+                </a:solidFill>
+              </a:rPr>
+              <a:t>comparacion</a:t>
+            </a:r>
+            <a:r>
+              <a:rPr lang="es-ES" sz="1400" dirty="0">
+                <a:solidFill>
+                  <a:schemeClr val="dk1"/>
+                </a:solidFill>
+              </a:rPr>
+              <a:t> de modelos </a:t>
+            </a:r>
+            <a:r>
+              <a:rPr lang="es-ES" sz="1400" dirty="0" err="1">
+                <a:solidFill>
+                  <a:schemeClr val="dk1"/>
+                </a:solidFill>
+              </a:rPr>
+              <a:t>permitio</a:t>
+            </a:r>
+            <a:r>
+              <a:rPr lang="es-ES" sz="1400" dirty="0">
+                <a:solidFill>
+                  <a:schemeClr val="dk1"/>
+                </a:solidFill>
+              </a:rPr>
+              <a:t> seleccionar la mejor alternativa </a:t>
+            </a:r>
+            <a:r>
+              <a:rPr lang="es-ES" sz="1400" dirty="0" err="1">
+                <a:solidFill>
+                  <a:schemeClr val="dk1"/>
+                </a:solidFill>
+              </a:rPr>
+              <a:t>segun</a:t>
+            </a:r>
+            <a:r>
+              <a:rPr lang="es-ES" sz="1400" dirty="0">
+                <a:solidFill>
+                  <a:schemeClr val="dk1"/>
+                </a:solidFill>
+              </a:rPr>
+              <a:t> las </a:t>
+            </a:r>
+            <a:r>
+              <a:rPr lang="es-ES" sz="1400" dirty="0" err="1">
+                <a:solidFill>
+                  <a:schemeClr val="dk1"/>
+                </a:solidFill>
+              </a:rPr>
+              <a:t>metricas</a:t>
+            </a:r>
+            <a:r>
+              <a:rPr lang="es-ES" sz="1400" dirty="0">
+                <a:solidFill>
+                  <a:schemeClr val="dk1"/>
+                </a:solidFill>
+              </a:rPr>
+              <a:t> definidas, evitando decisiones basadas solo en </a:t>
+            </a:r>
+            <a:r>
+              <a:rPr lang="es-ES" sz="1400" dirty="0" err="1">
+                <a:solidFill>
+                  <a:schemeClr val="dk1"/>
+                </a:solidFill>
+              </a:rPr>
+              <a:t>intuicion</a:t>
+            </a:r>
+            <a:r>
+              <a:rPr lang="es-ES" sz="1400" dirty="0">
+                <a:solidFill>
+                  <a:schemeClr val="dk1"/>
+                </a:solidFill>
+              </a:rPr>
+              <a:t>.</a:t>
+            </a:r>
+          </a:p>
+          <a:p>
+            <a:pPr marL="457200" lvl="0" indent="0" algn="l" rtl="0">
+              <a:lnSpc>
+                <a:spcPct val="101857"/>
+              </a:lnSpc>
+              <a:spcBef>
+                <a:spcPts val="0"/>
+              </a:spcBef>
+              <a:spcAft>
+                <a:spcPts val="0"/>
+              </a:spcAft>
+              <a:buNone/>
+            </a:pPr>
+            <a:endParaRPr lang="es-ES" sz="1400" dirty="0">
+              <a:solidFill>
+                <a:schemeClr val="dk1"/>
+              </a:solidFill>
+            </a:endParaRPr>
+          </a:p>
+          <a:p>
+            <a:pPr marL="457200" lvl="0" indent="0" algn="l" rtl="0">
+              <a:lnSpc>
+                <a:spcPct val="101857"/>
+              </a:lnSpc>
+              <a:spcBef>
+                <a:spcPts val="0"/>
+              </a:spcBef>
+              <a:spcAft>
+                <a:spcPts val="0"/>
+              </a:spcAft>
+              <a:buNone/>
+            </a:pPr>
+            <a:r>
+              <a:rPr lang="es-ES" sz="1400" dirty="0">
+                <a:solidFill>
+                  <a:schemeClr val="dk1"/>
+                </a:solidFill>
+              </a:rPr>
+              <a:t> </a:t>
+            </a:r>
+            <a:r>
+              <a:rPr lang="es-ES" sz="1400" dirty="0" err="1">
+                <a:solidFill>
+                  <a:schemeClr val="dk1"/>
+                </a:solidFill>
+              </a:rPr>
+              <a:t>Conclusion</a:t>
+            </a:r>
+            <a:r>
+              <a:rPr lang="es-ES" sz="1400" dirty="0">
+                <a:solidFill>
+                  <a:schemeClr val="dk1"/>
+                </a:solidFill>
+              </a:rPr>
+              <a:t> ejecutiva</a:t>
+            </a:r>
+          </a:p>
+          <a:p>
+            <a:pPr marL="457200" lvl="0" indent="0" algn="l" rtl="0">
+              <a:lnSpc>
+                <a:spcPct val="101857"/>
+              </a:lnSpc>
+              <a:spcBef>
+                <a:spcPts val="0"/>
+              </a:spcBef>
+              <a:spcAft>
+                <a:spcPts val="0"/>
+              </a:spcAft>
+              <a:buNone/>
+            </a:pPr>
+            <a:r>
+              <a:rPr lang="es-ES" sz="1400" dirty="0">
+                <a:solidFill>
+                  <a:schemeClr val="dk1"/>
+                </a:solidFill>
+              </a:rPr>
+              <a:t>El </a:t>
+            </a:r>
+            <a:r>
+              <a:rPr lang="es-ES" sz="1400" dirty="0" err="1">
+                <a:solidFill>
+                  <a:schemeClr val="dk1"/>
+                </a:solidFill>
+              </a:rPr>
+              <a:t>analisis</a:t>
+            </a:r>
+            <a:r>
+              <a:rPr lang="es-ES" sz="1400" dirty="0">
+                <a:solidFill>
+                  <a:schemeClr val="dk1"/>
+                </a:solidFill>
+              </a:rPr>
+              <a:t> confirma que un proceso riguroso de </a:t>
+            </a:r>
+            <a:r>
+              <a:rPr lang="es-ES" sz="1400" dirty="0" err="1">
+                <a:solidFill>
+                  <a:schemeClr val="dk1"/>
+                </a:solidFill>
+              </a:rPr>
+              <a:t>preparacion</a:t>
+            </a:r>
+            <a:r>
+              <a:rPr lang="es-ES" sz="1400" dirty="0">
+                <a:solidFill>
+                  <a:schemeClr val="dk1"/>
+                </a:solidFill>
+              </a:rPr>
+              <a:t> de datos, junto con una </a:t>
+            </a:r>
+            <a:r>
+              <a:rPr lang="es-ES" sz="1400" dirty="0" err="1">
+                <a:solidFill>
+                  <a:schemeClr val="dk1"/>
+                </a:solidFill>
+              </a:rPr>
+              <a:t>seleccion</a:t>
+            </a:r>
+            <a:r>
+              <a:rPr lang="es-ES" sz="1400" dirty="0">
+                <a:solidFill>
+                  <a:schemeClr val="dk1"/>
+                </a:solidFill>
+              </a:rPr>
+              <a:t> cuidadosa de variables y modelos, permite construir una </a:t>
+            </a:r>
+            <a:r>
+              <a:rPr lang="es-ES" sz="1400" dirty="0" err="1">
+                <a:solidFill>
+                  <a:schemeClr val="dk1"/>
+                </a:solidFill>
+              </a:rPr>
+              <a:t>solucion</a:t>
+            </a:r>
+            <a:r>
+              <a:rPr lang="es-ES" sz="1400" dirty="0">
+                <a:solidFill>
+                  <a:schemeClr val="dk1"/>
+                </a:solidFill>
+              </a:rPr>
+              <a:t> </a:t>
+            </a:r>
+            <a:r>
+              <a:rPr lang="es-ES" sz="1400" dirty="0" err="1">
+                <a:solidFill>
+                  <a:schemeClr val="dk1"/>
+                </a:solidFill>
+              </a:rPr>
+              <a:t>analitica</a:t>
+            </a:r>
+            <a:r>
+              <a:rPr lang="es-ES" sz="1400" dirty="0">
+                <a:solidFill>
+                  <a:schemeClr val="dk1"/>
+                </a:solidFill>
+              </a:rPr>
+              <a:t> solida para clientes de telecomunicaciones. En </a:t>
+            </a:r>
+            <a:r>
+              <a:rPr lang="es-ES" sz="1400" dirty="0" err="1">
+                <a:solidFill>
+                  <a:schemeClr val="dk1"/>
+                </a:solidFill>
+              </a:rPr>
+              <a:t>terminos</a:t>
+            </a:r>
+            <a:r>
+              <a:rPr lang="es-ES" sz="1400" dirty="0">
+                <a:solidFill>
+                  <a:schemeClr val="dk1"/>
+                </a:solidFill>
+              </a:rPr>
+              <a:t> de negocio, este enfoque mejora la </a:t>
+            </a:r>
+            <a:r>
+              <a:rPr lang="es-ES" sz="1400" dirty="0" err="1">
+                <a:solidFill>
+                  <a:schemeClr val="dk1"/>
+                </a:solidFill>
+              </a:rPr>
+              <a:t>interpretacion</a:t>
+            </a:r>
+            <a:r>
+              <a:rPr lang="es-ES" sz="1400" dirty="0">
+                <a:solidFill>
+                  <a:schemeClr val="dk1"/>
+                </a:solidFill>
+              </a:rPr>
+              <a:t> de los patrones observados, fortalece la capacidad predictiva y entrega una base confiable para apoyar decisiones comerciales y operativas.</a:t>
+            </a:r>
+          </a:p>
+          <a:p>
+            <a:pPr marL="457200" lvl="0" indent="0" algn="l" rtl="0">
+              <a:lnSpc>
+                <a:spcPct val="101857"/>
+              </a:lnSpc>
+              <a:spcBef>
+                <a:spcPts val="0"/>
+              </a:spcBef>
+              <a:spcAft>
+                <a:spcPts val="0"/>
+              </a:spcAft>
+              <a:buNone/>
+            </a:pPr>
+            <a:endParaRPr lang="es-ES" sz="1400" dirty="0">
+              <a:solidFill>
+                <a:schemeClr val="dk1"/>
+              </a:solidFill>
+            </a:endParaRPr>
+          </a:p>
+          <a:p>
+            <a:pPr marL="457200" lvl="0" indent="0" algn="l" rtl="0">
+              <a:lnSpc>
+                <a:spcPct val="101857"/>
+              </a:lnSpc>
+              <a:spcBef>
+                <a:spcPts val="0"/>
+              </a:spcBef>
+              <a:spcAft>
+                <a:spcPts val="0"/>
+              </a:spcAft>
+              <a:buNone/>
+            </a:pPr>
+            <a:r>
+              <a:rPr lang="es-ES" sz="1400" dirty="0">
+                <a:solidFill>
+                  <a:schemeClr val="dk1"/>
+                </a:solidFill>
+              </a:rPr>
+              <a:t>Recomendación final</a:t>
+            </a:r>
+          </a:p>
+          <a:p>
+            <a:pPr marL="457200" lvl="0" indent="0" algn="l" rtl="0">
+              <a:lnSpc>
+                <a:spcPct val="101857"/>
+              </a:lnSpc>
+              <a:spcBef>
+                <a:spcPts val="0"/>
+              </a:spcBef>
+              <a:spcAft>
+                <a:spcPts val="0"/>
+              </a:spcAft>
+              <a:buNone/>
+            </a:pPr>
+            <a:r>
+              <a:rPr lang="es-ES" sz="1400" dirty="0">
+                <a:solidFill>
+                  <a:schemeClr val="dk1"/>
+                </a:solidFill>
+              </a:rPr>
+              <a:t>Para la siguiente </a:t>
+            </a:r>
+            <a:r>
+              <a:rPr lang="es-ES" sz="1400" dirty="0" err="1">
+                <a:solidFill>
+                  <a:schemeClr val="dk1"/>
+                </a:solidFill>
+              </a:rPr>
+              <a:t>iteracion</a:t>
+            </a:r>
+            <a:r>
+              <a:rPr lang="es-ES" sz="1400" dirty="0">
+                <a:solidFill>
+                  <a:schemeClr val="dk1"/>
+                </a:solidFill>
+              </a:rPr>
+              <a:t>, se sugiere:</a:t>
+            </a:r>
+          </a:p>
+          <a:p>
+            <a:pPr marL="457200" lvl="0" indent="0" algn="l" rtl="0">
+              <a:lnSpc>
+                <a:spcPct val="101857"/>
+              </a:lnSpc>
+              <a:spcBef>
+                <a:spcPts val="0"/>
+              </a:spcBef>
+              <a:spcAft>
+                <a:spcPts val="0"/>
+              </a:spcAft>
+              <a:buNone/>
+            </a:pPr>
+            <a:r>
+              <a:rPr lang="es-ES" sz="1400" dirty="0">
+                <a:solidFill>
+                  <a:schemeClr val="dk1"/>
+                </a:solidFill>
+              </a:rPr>
+              <a:t>- incorporar mas variables de comportamiento del cliente,</a:t>
+            </a:r>
+          </a:p>
+          <a:p>
+            <a:pPr marL="457200" lvl="0" indent="0" algn="l" rtl="0">
+              <a:lnSpc>
+                <a:spcPct val="101857"/>
+              </a:lnSpc>
+              <a:spcBef>
+                <a:spcPts val="0"/>
+              </a:spcBef>
+              <a:spcAft>
+                <a:spcPts val="0"/>
+              </a:spcAft>
+              <a:buNone/>
+            </a:pPr>
+            <a:r>
+              <a:rPr lang="es-ES" sz="1400" dirty="0">
+                <a:solidFill>
+                  <a:schemeClr val="dk1"/>
+                </a:solidFill>
+              </a:rPr>
+              <a:t>- probar modelos no lineales adicionales,</a:t>
+            </a:r>
+          </a:p>
+          <a:p>
+            <a:pPr marL="457200" lvl="0" indent="0" algn="l" rtl="0">
+              <a:lnSpc>
+                <a:spcPct val="101857"/>
+              </a:lnSpc>
+              <a:spcBef>
+                <a:spcPts val="0"/>
+              </a:spcBef>
+              <a:spcAft>
+                <a:spcPts val="0"/>
+              </a:spcAft>
+              <a:buNone/>
+            </a:pPr>
+            <a:r>
+              <a:rPr lang="es-ES" sz="1400" dirty="0">
+                <a:solidFill>
+                  <a:schemeClr val="dk1"/>
+                </a:solidFill>
+              </a:rPr>
+              <a:t>- y validar el desempeño con </a:t>
+            </a:r>
+            <a:r>
+              <a:rPr lang="es-ES" sz="1400" dirty="0" err="1">
+                <a:solidFill>
+                  <a:schemeClr val="dk1"/>
+                </a:solidFill>
+              </a:rPr>
+              <a:t>metricas</a:t>
+            </a:r>
+            <a:r>
+              <a:rPr lang="es-ES" sz="1400" dirty="0">
+                <a:solidFill>
+                  <a:schemeClr val="dk1"/>
+                </a:solidFill>
+              </a:rPr>
+              <a:t> orientadas al objetivo de negocio.</a:t>
+            </a:r>
+          </a:p>
+        </p:txBody>
+      </p:sp>
+    </p:spTree>
+    <p:extLst>
+      <p:ext uri="{BB962C8B-B14F-4D97-AF65-F5344CB8AC3E}">
+        <p14:creationId xmlns:p14="http://schemas.microsoft.com/office/powerpoint/2010/main" val="383755582"/>
+      </p:ext>
+    </p:extLst>
+  </p:cSld>
+  <p:clrMapOvr>
+    <a:masterClrMapping/>
+  </p:clrMapOvr>
+</p:sld>
+</file>
+
+<file path=ppt/slides/slide14.xml><?xml version="1.0" encoding="utf-8"?>
 <p:sld xmlns:a="http://schemas.openxmlformats.org/drawingml/2006/main" xmlns:r="http://schemas.openxmlformats.org/officeDocument/2006/relationships" xmlns:p="http://schemas.openxmlformats.org/presentationml/2006/main">
   <p:cSld>
     <p:spTree>
@@ -22893,7 +23745,7 @@
 </p:sld>
 </file>
 
-<file path=ppt/slides/slide14.xml><?xml version="1.0" encoding="utf-8"?>
+<file path=ppt/slides/slide15.xml><?xml version="1.0" encoding="utf-8"?>
 <p:sld xmlns:a="http://schemas.openxmlformats.org/drawingml/2006/main" xmlns:r="http://schemas.openxmlformats.org/officeDocument/2006/relationships" xmlns:p="http://schemas.openxmlformats.org/presentationml/2006/main">
   <p:cSld>
     <p:spTree>
@@ -23096,7 +23948,7 @@
 </p:sld>
 </file>
 
-<file path=ppt/slides/slide15.xml><?xml version="1.0" encoding="utf-8"?>
+<file path=ppt/slides/slide16.xml><?xml version="1.0" encoding="utf-8"?>
 <p:sld xmlns:a="http://schemas.openxmlformats.org/drawingml/2006/main" xmlns:r="http://schemas.openxmlformats.org/officeDocument/2006/relationships" xmlns:p="http://schemas.openxmlformats.org/presentationml/2006/main">
   <p:cSld>
     <p:spTree>
@@ -23353,7 +24205,7 @@
               <a:buChar char="●"/>
             </a:pPr>
             <a:r>
-              <a:rPr lang="es-CL" sz="2800" b="0" i="0" u="none" strike="noStrike" cap="none">
+              <a:rPr lang="es-CL" sz="2800" b="0" i="0" u="none" strike="noStrike" cap="none" dirty="0">
                 <a:solidFill>
                   <a:schemeClr val="dk1"/>
                 </a:solidFill>
@@ -23362,9 +24214,9 @@
                 <a:cs typeface="Arial"/>
                 <a:sym typeface="Arial"/>
               </a:rPr>
-              <a:t>Nuestro objetivo es consolidar la limpieza y casualidad de datos.</a:t>
-            </a:r>
-            <a:endParaRPr sz="2800" b="0" i="0" u="none" strike="noStrike" cap="none">
+              <a:t>Nuestro objetivo es consolidar la limpieza y causalidad de datos.</a:t>
+            </a:r>
+            <a:endParaRPr sz="2800" b="0" i="0" u="none" strike="noStrike" cap="none" dirty="0">
               <a:solidFill>
                 <a:schemeClr val="dk1"/>
               </a:solidFill>
@@ -23393,7 +24245,7 @@
               <a:buChar char="●"/>
             </a:pPr>
             <a:r>
-              <a:rPr lang="es-CL" sz="2800" b="0" i="0" u="none" strike="noStrike" cap="none">
+              <a:rPr lang="es-CL" sz="2800" b="0" i="0" u="none" strike="noStrike" cap="none" dirty="0">
                 <a:solidFill>
                   <a:schemeClr val="dk1"/>
                 </a:solidFill>
@@ -23402,9 +24254,33 @@
                 <a:cs typeface="Arial"/>
                 <a:sym typeface="Arial"/>
               </a:rPr>
-              <a:t>Unir estadísticas descriptivas claves tales como la demografía,causas,triage,territorio, cotos y temporalidad.</a:t>
-            </a:r>
-            <a:endParaRPr sz="2800" b="0" i="0" u="none" strike="noStrike" cap="none">
+              <a:t>Unir estadísticas descriptivas claves tales como la </a:t>
+            </a:r>
+            <a:r>
+              <a:rPr lang="es-CL" sz="2800" b="0" i="0" u="none" strike="noStrike" cap="none" dirty="0" err="1">
+                <a:solidFill>
+                  <a:schemeClr val="dk1"/>
+                </a:solidFill>
+                <a:latin typeface="Arial"/>
+                <a:ea typeface="Arial"/>
+                <a:cs typeface="Arial"/>
+                <a:sym typeface="Arial"/>
+              </a:rPr>
+              <a:t>demografía,causas,triage,territorio</a:t>
+            </a:r>
+            <a:r>
+              <a:rPr lang="es-CL" sz="2800" b="0" i="0" u="none" strike="noStrike" cap="none" dirty="0">
+                <a:solidFill>
+                  <a:schemeClr val="dk1"/>
+                </a:solidFill>
+                <a:latin typeface="Arial"/>
+                <a:ea typeface="Arial"/>
+                <a:cs typeface="Arial"/>
+                <a:sym typeface="Arial"/>
+              </a:rPr>
+              <a:t>, costos y temporalidad.</a:t>
+            </a:r>
+            <a:endParaRPr sz="2800" b="0" i="0" u="none" strike="noStrike" cap="none" dirty="0">
               <a:solidFill>
                 <a:schemeClr val="dk1"/>
               </a:solidFill>
@@ -23433,7 +24309,7 @@
               <a:buChar char="●"/>
             </a:pPr>
             <a:r>
-              <a:rPr lang="es-CL" sz="2800" b="0" i="0" u="none" strike="noStrike" cap="none">
+              <a:rPr lang="es-CL" sz="2800" b="0" i="0" u="none" strike="noStrike" cap="none" dirty="0">
                 <a:solidFill>
                   <a:schemeClr val="dk1"/>
                 </a:solidFill>
@@ -23444,7 +24320,7 @@
               </a:rPr>
               <a:t>Incorporar un modelo logístico para explicar Hospital vs Centro de salud </a:t>
             </a:r>
-            <a:endParaRPr sz="2800" b="0" i="0" u="none" strike="noStrike" cap="none">
+            <a:endParaRPr sz="2800" b="0" i="0" u="none" strike="noStrike" cap="none" dirty="0">
               <a:solidFill>
                 <a:schemeClr val="dk1"/>
               </a:solidFill>
@@ -23778,7 +24654,7 @@
         </p:spPr>
         <p:txBody>
           <a:bodyPr spcFirstLastPara="1" wrap="square" lIns="91425" tIns="45700" rIns="91425" bIns="45700" anchor="t" anchorCtr="0">
-            <a:normAutofit fontScale="92500" lnSpcReduction="10000"/>
+            <a:normAutofit fontScale="92500" lnSpcReduction="20000"/>
           </a:bodyPr>
           <a:lstStyle/>
           <a:p>
@@ -23799,7 +24675,7 @@
               <a:buFont typeface="Noto Sans Symbols"/>
               <a:buNone/>
             </a:pPr>
-            <a:endParaRPr sz="2800" b="0" i="0" u="none" strike="noStrike" cap="none">
+            <a:endParaRPr sz="2800" b="0" i="0" u="none" strike="noStrike" cap="none" dirty="0">
               <a:solidFill>
                 <a:schemeClr val="dk1"/>
               </a:solidFill>
@@ -23828,7 +24704,7 @@
               <a:buChar char="●"/>
             </a:pPr>
             <a:r>
-              <a:rPr lang="es-CL" sz="2800" b="0" i="0" u="none" strike="noStrike" cap="none">
+              <a:rPr lang="es-CL" sz="2800" b="0" i="0" u="none" strike="noStrike" cap="none" dirty="0">
                 <a:solidFill>
                   <a:schemeClr val="dk1"/>
                 </a:solidFill>
@@ -23839,7 +24715,7 @@
               </a:rPr>
               <a:t>Lo que se busca predecir es que la atención de urgencia ocurrirá en un hospital o en un centro de salud.</a:t>
             </a:r>
-            <a:endParaRPr sz="2800" b="0" i="0" u="none" strike="noStrike" cap="none">
+            <a:endParaRPr sz="2800" b="0" i="0" u="none" strike="noStrike" cap="none" dirty="0">
               <a:solidFill>
                 <a:schemeClr val="dk1"/>
               </a:solidFill>
@@ -23868,14 +24744,30 @@
               <a:buChar char="●"/>
             </a:pPr>
             <a:r>
-              <a:rPr lang="es-CL" sz="2800">
-                <a:solidFill>
-                  <a:schemeClr val="dk1"/>
-                </a:solidFill>
-              </a:rPr>
-              <a:t>Y segun el territorio de atencion segun las regiones. </a:t>
-            </a:r>
-            <a:endParaRPr sz="2800" b="0" i="0" u="none" strike="noStrike" cap="none">
+              <a:rPr lang="es-CL" sz="2800" dirty="0">
+                <a:solidFill>
+                  <a:schemeClr val="dk1"/>
+                </a:solidFill>
+              </a:rPr>
+              <a:t>Y </a:t>
+            </a:r>
+            <a:r>
+              <a:rPr lang="es-CL" sz="2800" dirty="0" err="1">
+                <a:solidFill>
+                  <a:schemeClr val="dk1"/>
+                </a:solidFill>
+              </a:rPr>
+              <a:t>segun</a:t>
+            </a:r>
+            <a:r>
+              <a:rPr lang="es-CL" sz="2800" dirty="0">
+                <a:solidFill>
+                  <a:schemeClr val="dk1"/>
+                </a:solidFill>
+              </a:rPr>
+              <a:t> el territorio de atención según las regiones y las edades de los pacientes. </a:t>
+            </a:r>
+            <a:endParaRPr sz="2800" b="0" i="0" u="none" strike="noStrike" cap="none" dirty="0">
               <a:solidFill>
                 <a:schemeClr val="dk1"/>
               </a:solidFill>
@@ -24236,8 +25128,8 @@
         </p:nvSpPr>
         <p:spPr>
           <a:xfrm>
-            <a:off x="654840" y="551160"/>
-            <a:ext cx="4916520" cy="469440"/>
+            <a:off x="610726" y="477206"/>
+            <a:ext cx="4983828" cy="1436665"/>
           </a:xfrm>
           <a:prstGeom prst="rect">
             <a:avLst/>
@@ -24271,14 +25163,14 @@
               <a:buChar char="•"/>
             </a:pPr>
             <a:r>
-              <a:rPr lang="es-CL" sz="3200" b="1">
-                <a:solidFill>
-                  <a:schemeClr val="dk1"/>
-                </a:solidFill>
-              </a:rPr>
-              <a:t>Analisis de los graficos segun lo estudiado </a:t>
-            </a:r>
-            <a:endParaRPr sz="3200" b="0" i="0" u="none" strike="noStrike" cap="none">
+              <a:rPr lang="es-CL" sz="3200" b="1" dirty="0">
+                <a:solidFill>
+                  <a:schemeClr val="dk1"/>
+                </a:solidFill>
+              </a:rPr>
+              <a:t>Análisis de los gráficos según lo estudiado </a:t>
+            </a:r>
+            <a:endParaRPr sz="3200" b="0" i="0" u="none" strike="noStrike" cap="none" dirty="0">
               <a:solidFill>
                 <a:schemeClr val="dk1"/>
               </a:solidFill>
@@ -24302,8 +25194,8 @@
         </p:nvSpPr>
         <p:spPr>
           <a:xfrm>
-            <a:off x="129209" y="1987826"/>
-            <a:ext cx="4995031" cy="3587854"/>
+            <a:off x="610726" y="5441760"/>
+            <a:ext cx="9086623" cy="791740"/>
           </a:xfrm>
           <a:prstGeom prst="rect">
             <a:avLst/>
@@ -24315,7 +25207,7 @@
         </p:spPr>
         <p:txBody>
           <a:bodyPr spcFirstLastPara="1" wrap="square" lIns="91425" tIns="45700" rIns="91425" bIns="45700" anchor="t" anchorCtr="0">
-            <a:normAutofit/>
+            <a:noAutofit/>
           </a:bodyPr>
           <a:lstStyle/>
           <a:p>
@@ -24324,7 +25216,7 @@
                 <a:spcPct val="115000"/>
               </a:lnSpc>
               <a:spcBef>
-                <a:spcPts val="1300"/>
+                <a:spcPts val="0"/>
               </a:spcBef>
               <a:spcAft>
                 <a:spcPts val="0"/>
@@ -24336,7 +25228,7 @@
               <a:buChar char="●"/>
             </a:pPr>
             <a:r>
-              <a:rPr lang="es-CL" sz="1000" dirty="0">
+              <a:rPr lang="es-CL" sz="1400" dirty="0">
                 <a:solidFill>
                   <a:schemeClr val="dk1"/>
                 </a:solidFill>
@@ -24344,250 +25236,32 @@
                   <a:schemeClr val="lt1"/>
                 </a:highlight>
               </a:rPr>
-              <a:t>La demanda se concentra en </a:t>
-            </a:r>
-            <a:r>
-              <a:rPr lang="es-CL" sz="1000" dirty="0" err="1">
-                <a:solidFill>
-                  <a:schemeClr val="dk1"/>
-                </a:solidFill>
-                <a:highlight>
-                  <a:schemeClr val="lt1"/>
-                </a:highlight>
-              </a:rPr>
-              <a:t>triage</a:t>
-            </a:r>
-            <a:r>
-              <a:rPr lang="es-CL" sz="1000" dirty="0">
-                <a:solidFill>
-                  <a:schemeClr val="dk1"/>
-                </a:solidFill>
-                <a:highlight>
-                  <a:schemeClr val="lt1"/>
-                </a:highlight>
-              </a:rPr>
-              <a:t> medios, lo que indica que llegan muchas urgencias de complejidad intermedia.</a:t>
-            </a:r>
-            <a:endParaRPr sz="1000" dirty="0">
+              <a:t>Los hospitales atienden más casos que los centros de salud, por lo que absorben la mayor carga asistencial.</a:t>
+            </a:r>
+          </a:p>
+          <a:p>
+            <a:pPr marL="165100" lvl="0" indent="0" algn="l" rtl="0">
+              <a:lnSpc>
+                <a:spcPct val="115000"/>
+              </a:lnSpc>
+              <a:spcBef>
+                <a:spcPts val="0"/>
+              </a:spcBef>
+              <a:spcAft>
+                <a:spcPts val="0"/>
+              </a:spcAft>
+              <a:buClr>
+                <a:schemeClr val="dk1"/>
+              </a:buClr>
+              <a:buSzPts val="1000"/>
+            </a:pPr>
+            <a:endParaRPr sz="1400" dirty="0">
               <a:solidFill>
                 <a:schemeClr val="dk1"/>
               </a:solidFill>
               <a:highlight>
                 <a:schemeClr val="lt1"/>
               </a:highlight>
-            </a:endParaRPr>
-          </a:p>
-          <a:p>
-            <a:pPr marL="457200" lvl="0" indent="-292100" algn="l" rtl="0">
-              <a:lnSpc>
-                <a:spcPct val="115000"/>
-              </a:lnSpc>
-              <a:spcBef>
-                <a:spcPts val="0"/>
-              </a:spcBef>
-              <a:spcAft>
-                <a:spcPts val="0"/>
-              </a:spcAft>
-              <a:buClr>
-                <a:schemeClr val="dk1"/>
-              </a:buClr>
-              <a:buSzPts val="1000"/>
-              <a:buChar char="●"/>
-            </a:pPr>
-            <a:r>
-              <a:rPr lang="es-CL" sz="1000" dirty="0">
-                <a:solidFill>
-                  <a:schemeClr val="dk1"/>
-                </a:solidFill>
-                <a:highlight>
-                  <a:schemeClr val="lt1"/>
-                </a:highlight>
-              </a:rPr>
-              <a:t>Los hospitales atienden más casos que los centros de salud, por lo que absorben la mayor carga asistencial.</a:t>
-            </a:r>
-            <a:endParaRPr sz="1000" dirty="0">
-              <a:solidFill>
-                <a:schemeClr val="dk1"/>
-              </a:solidFill>
-              <a:highlight>
-                <a:schemeClr val="lt1"/>
-              </a:highlight>
-            </a:endParaRPr>
-          </a:p>
-          <a:p>
-            <a:pPr marL="457200" lvl="0" indent="-292100" algn="l" rtl="0">
-              <a:lnSpc>
-                <a:spcPct val="115000"/>
-              </a:lnSpc>
-              <a:spcBef>
-                <a:spcPts val="0"/>
-              </a:spcBef>
-              <a:spcAft>
-                <a:spcPts val="0"/>
-              </a:spcAft>
-              <a:buClr>
-                <a:schemeClr val="dk1"/>
-              </a:buClr>
-              <a:buSzPts val="1000"/>
-              <a:buChar char="●"/>
-            </a:pPr>
-            <a:r>
-              <a:rPr lang="es-CL" sz="1000" dirty="0">
-                <a:solidFill>
-                  <a:schemeClr val="dk1"/>
-                </a:solidFill>
-                <a:highlight>
-                  <a:schemeClr val="lt1"/>
-                </a:highlight>
-              </a:rPr>
-              <a:t>El costo de atención se distribuye de forma amplia, es decir, hay casos baratos y otros mucho más costosos.</a:t>
-            </a:r>
-            <a:endParaRPr sz="1000" dirty="0">
-              <a:solidFill>
-                <a:schemeClr val="dk1"/>
-              </a:solidFill>
-              <a:highlight>
-                <a:schemeClr val="lt1"/>
-              </a:highlight>
-            </a:endParaRPr>
-          </a:p>
-          <a:p>
-            <a:pPr marL="457200" lvl="0" indent="-292100" algn="l" rtl="0">
-              <a:lnSpc>
-                <a:spcPct val="115000"/>
-              </a:lnSpc>
-              <a:spcBef>
-                <a:spcPts val="0"/>
-              </a:spcBef>
-              <a:spcAft>
-                <a:spcPts val="0"/>
-              </a:spcAft>
-              <a:buClr>
-                <a:schemeClr val="dk1"/>
-              </a:buClr>
-              <a:buSzPts val="1000"/>
-              <a:buChar char="●"/>
-            </a:pPr>
-            <a:r>
-              <a:rPr lang="es-CL" sz="1000" dirty="0">
-                <a:solidFill>
-                  <a:schemeClr val="dk1"/>
-                </a:solidFill>
-                <a:highlight>
-                  <a:schemeClr val="lt1"/>
-                </a:highlight>
-              </a:rPr>
-              <a:t>Al mirar el costo por </a:t>
-            </a:r>
-            <a:r>
-              <a:rPr lang="es-CL" sz="1000" dirty="0" err="1">
-                <a:solidFill>
-                  <a:schemeClr val="dk1"/>
-                </a:solidFill>
-                <a:highlight>
-                  <a:schemeClr val="lt1"/>
-                </a:highlight>
-              </a:rPr>
-              <a:t>triage</a:t>
-            </a:r>
-            <a:r>
-              <a:rPr lang="es-CL" sz="1000" dirty="0">
-                <a:solidFill>
-                  <a:schemeClr val="dk1"/>
-                </a:solidFill>
-                <a:highlight>
-                  <a:schemeClr val="lt1"/>
-                </a:highlight>
-              </a:rPr>
-              <a:t>, se observa que los niveles más complejos tienden a mostrar mayor variación y, en general, mayor costo.</a:t>
-            </a:r>
-            <a:endParaRPr sz="1000" dirty="0">
-              <a:solidFill>
-                <a:schemeClr val="dk1"/>
-              </a:solidFill>
-              <a:highlight>
-                <a:schemeClr val="lt1"/>
-              </a:highlight>
-            </a:endParaRPr>
-          </a:p>
-          <a:p>
-            <a:pPr marL="0" lvl="0" indent="0" algn="l" rtl="0">
-              <a:lnSpc>
-                <a:spcPct val="115000"/>
-              </a:lnSpc>
-              <a:spcBef>
-                <a:spcPts val="1300"/>
-              </a:spcBef>
-              <a:spcAft>
-                <a:spcPts val="0"/>
-              </a:spcAft>
-              <a:buClr>
-                <a:schemeClr val="dk1"/>
-              </a:buClr>
-              <a:buSzPts val="1100"/>
-              <a:buFont typeface="Arial"/>
-              <a:buNone/>
-            </a:pPr>
-            <a:r>
-              <a:rPr lang="es-CL" sz="1000" dirty="0">
-                <a:solidFill>
-                  <a:schemeClr val="dk1"/>
-                </a:solidFill>
-                <a:highlight>
-                  <a:schemeClr val="lt1"/>
-                </a:highlight>
-              </a:rPr>
-              <a:t>Conclusión:</a:t>
-            </a:r>
-            <a:br>
-              <a:rPr lang="es-CL" sz="1000" dirty="0">
-                <a:solidFill>
-                  <a:schemeClr val="dk1"/>
-                </a:solidFill>
-                <a:highlight>
-                  <a:schemeClr val="lt1"/>
-                </a:highlight>
-              </a:rPr>
-            </a:br>
-            <a:r>
-              <a:rPr lang="es-CL" sz="1000" dirty="0">
-                <a:solidFill>
-                  <a:schemeClr val="dk1"/>
-                </a:solidFill>
-                <a:highlight>
-                  <a:schemeClr val="lt1"/>
-                </a:highlight>
-              </a:rPr>
-              <a:t>La red de urgencias atiende principalmente casos de complejidad intermedia, con mayor carga en hospitales y costos muy variables según el tipo de atención y la gravedad.</a:t>
-            </a:r>
-            <a:endParaRPr sz="1000" dirty="0">
-              <a:solidFill>
-                <a:schemeClr val="dk1"/>
-              </a:solidFill>
-              <a:highlight>
-                <a:schemeClr val="lt1"/>
-              </a:highlight>
-            </a:endParaRPr>
-          </a:p>
-          <a:p>
-            <a:pPr marL="0" marR="0" lvl="0" indent="0" algn="just" rtl="0">
-              <a:lnSpc>
-                <a:spcPct val="90000"/>
-              </a:lnSpc>
-              <a:spcBef>
-                <a:spcPts val="1200"/>
-              </a:spcBef>
-              <a:spcAft>
-                <a:spcPts val="0"/>
-              </a:spcAft>
-              <a:buSzPts val="1600"/>
-              <a:buFont typeface="Arial"/>
-              <a:buNone/>
-            </a:pPr>
-            <a:endParaRPr sz="1400" dirty="0">
-              <a:solidFill>
-                <a:schemeClr val="dk1"/>
-              </a:solidFill>
             </a:endParaRPr>
           </a:p>
         </p:txBody>
@@ -24718,8 +25392,8 @@
         </p:blipFill>
         <p:spPr>
           <a:xfrm>
-            <a:off x="6292685" y="3504522"/>
-            <a:ext cx="3968639" cy="2406677"/>
+            <a:off x="5770969" y="1412983"/>
+            <a:ext cx="5810305" cy="3610528"/>
           </a:xfrm>
           <a:prstGeom prst="rect">
             <a:avLst/>
@@ -24752,7 +25426,7 @@
         </p:blipFill>
         <p:spPr>
           <a:xfrm>
-            <a:off x="5571360" y="464429"/>
+            <a:off x="1068680" y="2066287"/>
             <a:ext cx="4067919" cy="2725425"/>
           </a:xfrm>
           <a:prstGeom prst="rect">
@@ -24787,64 +25461,96 @@
       </p:grpSpPr>
       <p:pic>
         <p:nvPicPr>
-          <p:cNvPr id="154" name="Google Shape;154;p8" title="f92a947a-d798-41fa-8517-f92d9db51d75.png"/>
-          <p:cNvPicPr preferRelativeResize="0"/>
+          <p:cNvPr id="3" name="Imagen 2">
+            <a:extLst>
+              <a:ext uri="{FF2B5EF4-FFF2-40B4-BE49-F238E27FC236}">
+                <a16:creationId xmlns:a16="http://schemas.microsoft.com/office/drawing/2014/main" id="{B6274A9D-7D1B-C2E3-7D44-B99CD0255ED5}"/>
+              </a:ext>
+            </a:extLst>
+          </p:cNvPr>
+          <p:cNvPicPr>
+            <a:picLocks noChangeAspect="1"/>
+          </p:cNvPicPr>
           <p:nvPr/>
         </p:nvPicPr>
         <p:blipFill>
-          <a:blip r:embed="rId2">
-            <a:alphaModFix/>
-          </a:blip>
+          <a:blip r:embed="rId2"/>
           <a:stretch>
             <a:fillRect/>
           </a:stretch>
         </p:blipFill>
         <p:spPr>
           <a:xfrm>
-            <a:off x="119269" y="904461"/>
-            <a:ext cx="6430615" cy="3212473"/>
+            <a:off x="318281" y="1378172"/>
+            <a:ext cx="11555438" cy="3743847"/>
+          </a:xfrm>
+          <a:prstGeom prst="rect">
+            <a:avLst/>
+          </a:prstGeom>
+        </p:spPr>
+      </p:pic>
+      <p:sp>
+        <p:nvSpPr>
+          <p:cNvPr id="4" name="CuadroTexto 3">
+            <a:extLst>
+              <a:ext uri="{FF2B5EF4-FFF2-40B4-BE49-F238E27FC236}">
+                <a16:creationId xmlns:a16="http://schemas.microsoft.com/office/drawing/2014/main" id="{D650ECA9-1988-49C3-B97E-1F7A34857DC0}"/>
+              </a:ext>
+            </a:extLst>
+          </p:cNvPr>
+          <p:cNvSpPr txBox="1"/>
+          <p:nvPr/>
+        </p:nvSpPr>
+        <p:spPr>
+          <a:xfrm>
+            <a:off x="1061883" y="473704"/>
+            <a:ext cx="8976852" cy="566758"/>
           </a:xfrm>
           <a:prstGeom prst="rect">
             <a:avLst/>
           </a:prstGeom>
           <a:noFill/>
-          <a:ln>
-            <a:noFill/>
-          </a:ln>
         </p:spPr>
-      </p:pic>
-      <p:pic>
-        <p:nvPicPr>
-          <p:cNvPr id="153" name="Google Shape;153;p8" title="72ca74db-9f68-4424-bfc8-93bd98be6eed.png"/>
-          <p:cNvPicPr preferRelativeResize="0"/>
-          <p:nvPr/>
-        </p:nvPicPr>
-        <p:blipFill>
-          <a:blip r:embed="rId3">
-            <a:alphaModFix/>
-          </a:blip>
-          <a:stretch>
-            <a:fillRect/>
-          </a:stretch>
-        </p:blipFill>
-        <p:spPr>
-          <a:xfrm>
-            <a:off x="6947451" y="904461"/>
-            <a:ext cx="4731027" cy="3314686"/>
-          </a:xfrm>
-          <a:prstGeom prst="rect">
-            <a:avLst/>
-          </a:prstGeom>
-          <a:noFill/>
-          <a:ln>
-            <a:noFill/>
-          </a:ln>
-        </p:spPr>
-      </p:pic>
+        <p:txBody>
+          <a:bodyPr wrap="square">
+            <a:spAutoFit/>
+          </a:bodyPr>
+          <a:lstStyle/>
+          <a:p>
+            <a:pPr marL="457200" lvl="0" indent="-292100" algn="l" rtl="0">
+              <a:lnSpc>
+                <a:spcPct val="115000"/>
+              </a:lnSpc>
+              <a:spcBef>
+                <a:spcPts val="0"/>
+              </a:spcBef>
+              <a:spcAft>
+                <a:spcPts val="0"/>
+              </a:spcAft>
+              <a:buClr>
+                <a:schemeClr val="dk1"/>
+              </a:buClr>
+              <a:buSzPts val="1000"/>
+              <a:buChar char="●"/>
+            </a:pPr>
+            <a:r>
+              <a:rPr lang="es-CL" sz="1400" dirty="0">
+                <a:solidFill>
+                  <a:schemeClr val="dk1"/>
+                </a:solidFill>
+                <a:highlight>
+                  <a:schemeClr val="lt1"/>
+                </a:highlight>
+              </a:rPr>
+              <a:t>El costo de atención se distribuye de forma amplia, es decir, hay casos baratos y otros mucho más costosos.</a:t>
+            </a:r>
+          </a:p>
+        </p:txBody>
+      </p:sp>
     </p:spTree>
     <p:extLst>
       <p:ext uri="{BB962C8B-B14F-4D97-AF65-F5344CB8AC3E}">
-        <p14:creationId xmlns:p14="http://schemas.microsoft.com/office/powerpoint/2010/main" val="848884770"/>
+        <p14:creationId xmlns:p14="http://schemas.microsoft.com/office/powerpoint/2010/main" val="988563917"/>
       </p:ext>
     </p:extLst>
   </p:cSld>
